--- a/Презентация.pptx
+++ b/Презентация.pptx
@@ -2,13 +2,13 @@
 <file path=ppt/presentation.xml><?xml version="1.0" encoding="utf-8"?>
 <p:presentation xmlns:a="http://schemas.openxmlformats.org/drawingml/2006/main" xmlns:r="http://schemas.openxmlformats.org/officeDocument/2006/relationships" xmlns:p="http://schemas.openxmlformats.org/presentationml/2006/main" saveSubsetFonts="1">
   <p:sldMasterIdLst>
-    <p:sldMasterId id="2147483678" r:id="rId1"/>
+    <p:sldMasterId id="2147483792" r:id="rId1"/>
   </p:sldMasterIdLst>
   <p:notesMasterIdLst>
-    <p:notesMasterId r:id="rId19"/>
+    <p:notesMasterId r:id="rId17"/>
   </p:notesMasterIdLst>
   <p:sldIdLst>
-    <p:sldId id="257" r:id="rId2"/>
+    <p:sldId id="284" r:id="rId2"/>
     <p:sldId id="258" r:id="rId3"/>
     <p:sldId id="268" r:id="rId4"/>
     <p:sldId id="269" r:id="rId5"/>
@@ -18,13 +18,11 @@
     <p:sldId id="276" r:id="rId9"/>
     <p:sldId id="277" r:id="rId10"/>
     <p:sldId id="279" r:id="rId11"/>
-    <p:sldId id="280" r:id="rId12"/>
-    <p:sldId id="281" r:id="rId13"/>
-    <p:sldId id="283" r:id="rId14"/>
-    <p:sldId id="282" r:id="rId15"/>
-    <p:sldId id="273" r:id="rId16"/>
-    <p:sldId id="274" r:id="rId17"/>
-    <p:sldId id="265" r:id="rId18"/>
+    <p:sldId id="281" r:id="rId12"/>
+    <p:sldId id="283" r:id="rId13"/>
+    <p:sldId id="282" r:id="rId14"/>
+    <p:sldId id="273" r:id="rId15"/>
+    <p:sldId id="274" r:id="rId16"/>
   </p:sldIdLst>
   <p:sldSz cx="12192000" cy="6858000"/>
   <p:notesSz cx="6858000" cy="9144000"/>
@@ -213,7 +211,7 @@
           <a:p>
             <a:fld id="{1859C5D3-A778-46E5-A401-4CF372F13560}" type="datetimeFigureOut">
               <a:rPr lang="ru-RU" smtClean="0"/>
-              <a:t>09.06.2026</a:t>
+              <a:t>10.06.2026</a:t>
             </a:fld>
             <a:endParaRPr lang="ru-RU"/>
           </a:p>
@@ -588,7 +586,7 @@
     </p:spTree>
     <p:extLst>
       <p:ext uri="{BB962C8B-B14F-4D97-AF65-F5344CB8AC3E}">
-        <p14:creationId xmlns:p14="http://schemas.microsoft.com/office/powerpoint/2010/main" val="3338176275"/>
+        <p14:creationId xmlns:p14="http://schemas.microsoft.com/office/powerpoint/2010/main" val="248382724"/>
       </p:ext>
     </p:extLst>
   </p:cSld>
@@ -769,7 +767,7 @@
           <a:p>
             <a:fld id="{6F60A7F0-D342-4A54-9125-FF639292C250}" type="datetimeFigureOut">
               <a:rPr lang="ru-RU" smtClean="0"/>
-              <a:t>09.06.2026</a:t>
+              <a:t>10.06.2026</a:t>
             </a:fld>
             <a:endParaRPr lang="ru-RU"/>
           </a:p>
@@ -820,7 +818,7 @@
     </p:spTree>
     <p:extLst>
       <p:ext uri="{BB962C8B-B14F-4D97-AF65-F5344CB8AC3E}">
-        <p14:creationId xmlns:p14="http://schemas.microsoft.com/office/powerpoint/2010/main" val="4270113149"/>
+        <p14:creationId xmlns:p14="http://schemas.microsoft.com/office/powerpoint/2010/main" val="2669659640"/>
       </p:ext>
     </p:extLst>
   </p:cSld>
@@ -935,7 +933,10 @@
           <a:noFill/>
           <a:ln w="82550" cap="sq">
             <a:solidFill>
-              <a:srgbClr val="EAEAEA"/>
+              <a:schemeClr val="bg2">
+                <a:lumMod val="60000"/>
+                <a:lumOff val="40000"/>
+              </a:schemeClr>
             </a:solidFill>
             <a:miter lim="800000"/>
           </a:ln>
@@ -1084,7 +1085,7 @@
           <a:p>
             <a:fld id="{6F60A7F0-D342-4A54-9125-FF639292C250}" type="datetimeFigureOut">
               <a:rPr lang="ru-RU" smtClean="0"/>
-              <a:t>09.06.2026</a:t>
+              <a:t>10.06.2026</a:t>
             </a:fld>
             <a:endParaRPr lang="ru-RU"/>
           </a:p>
@@ -1135,7 +1136,7 @@
     </p:spTree>
     <p:extLst>
       <p:ext uri="{BB962C8B-B14F-4D97-AF65-F5344CB8AC3E}">
-        <p14:creationId xmlns:p14="http://schemas.microsoft.com/office/powerpoint/2010/main" val="1260251793"/>
+        <p14:creationId xmlns:p14="http://schemas.microsoft.com/office/powerpoint/2010/main" val="1445945523"/>
       </p:ext>
     </p:extLst>
   </p:cSld>
@@ -1309,7 +1310,7 @@
           <a:p>
             <a:fld id="{6F60A7F0-D342-4A54-9125-FF639292C250}" type="datetimeFigureOut">
               <a:rPr lang="ru-RU" smtClean="0"/>
-              <a:t>09.06.2026</a:t>
+              <a:t>10.06.2026</a:t>
             </a:fld>
             <a:endParaRPr lang="ru-RU"/>
           </a:p>
@@ -1360,7 +1361,7 @@
     </p:spTree>
     <p:extLst>
       <p:ext uri="{BB962C8B-B14F-4D97-AF65-F5344CB8AC3E}">
-        <p14:creationId xmlns:p14="http://schemas.microsoft.com/office/powerpoint/2010/main" val="2709547246"/>
+        <p14:creationId xmlns:p14="http://schemas.microsoft.com/office/powerpoint/2010/main" val="3013286100"/>
       </p:ext>
     </p:extLst>
   </p:cSld>
@@ -1603,7 +1604,7 @@
           <a:p>
             <a:fld id="{6F60A7F0-D342-4A54-9125-FF639292C250}" type="datetimeFigureOut">
               <a:rPr lang="ru-RU" smtClean="0"/>
-              <a:t>09.06.2026</a:t>
+              <a:t>10.06.2026</a:t>
             </a:fld>
             <a:endParaRPr lang="ru-RU"/>
           </a:p>
@@ -1886,7 +1887,7 @@
     </p:spTree>
     <p:extLst>
       <p:ext uri="{BB962C8B-B14F-4D97-AF65-F5344CB8AC3E}">
-        <p14:creationId xmlns:p14="http://schemas.microsoft.com/office/powerpoint/2010/main" val="3356330602"/>
+        <p14:creationId xmlns:p14="http://schemas.microsoft.com/office/powerpoint/2010/main" val="981246777"/>
       </p:ext>
     </p:extLst>
   </p:cSld>
@@ -2060,7 +2061,7 @@
           <a:p>
             <a:fld id="{6F60A7F0-D342-4A54-9125-FF639292C250}" type="datetimeFigureOut">
               <a:rPr lang="ru-RU" smtClean="0"/>
-              <a:t>09.06.2026</a:t>
+              <a:t>10.06.2026</a:t>
             </a:fld>
             <a:endParaRPr lang="ru-RU"/>
           </a:p>
@@ -2111,7 +2112,7 @@
     </p:spTree>
     <p:extLst>
       <p:ext uri="{BB962C8B-B14F-4D97-AF65-F5344CB8AC3E}">
-        <p14:creationId xmlns:p14="http://schemas.microsoft.com/office/powerpoint/2010/main" val="4162372547"/>
+        <p14:creationId xmlns:p14="http://schemas.microsoft.com/office/powerpoint/2010/main" val="4141038200"/>
       </p:ext>
     </p:extLst>
   </p:cSld>
@@ -2639,7 +2640,7 @@
           <a:p>
             <a:fld id="{6F60A7F0-D342-4A54-9125-FF639292C250}" type="datetimeFigureOut">
               <a:rPr lang="ru-RU" smtClean="0"/>
-              <a:t>09.06.2026</a:t>
+              <a:t>10.06.2026</a:t>
             </a:fld>
             <a:endParaRPr lang="ru-RU"/>
           </a:p>
@@ -2690,7 +2691,7 @@
     </p:spTree>
     <p:extLst>
       <p:ext uri="{BB962C8B-B14F-4D97-AF65-F5344CB8AC3E}">
-        <p14:creationId xmlns:p14="http://schemas.microsoft.com/office/powerpoint/2010/main" val="3142906366"/>
+        <p14:creationId xmlns:p14="http://schemas.microsoft.com/office/powerpoint/2010/main" val="638564443"/>
       </p:ext>
     </p:extLst>
   </p:cSld>
@@ -2875,7 +2876,10 @@
           <a:noFill/>
           <a:ln w="82550" cap="sq">
             <a:solidFill>
-              <a:srgbClr val="EAEAEA"/>
+              <a:schemeClr val="bg2">
+                <a:lumMod val="60000"/>
+                <a:lumOff val="40000"/>
+              </a:schemeClr>
             </a:solidFill>
             <a:miter lim="800000"/>
           </a:ln>
@@ -3108,7 +3112,10 @@
           <a:noFill/>
           <a:ln w="82550" cap="sq">
             <a:solidFill>
-              <a:srgbClr val="EAEAEA"/>
+              <a:schemeClr val="bg2">
+                <a:lumMod val="60000"/>
+                <a:lumOff val="40000"/>
+              </a:schemeClr>
             </a:solidFill>
             <a:miter lim="800000"/>
           </a:ln>
@@ -3341,7 +3348,10 @@
           <a:noFill/>
           <a:ln w="82550" cap="sq">
             <a:solidFill>
-              <a:srgbClr val="EAEAEA"/>
+              <a:schemeClr val="bg2">
+                <a:lumMod val="60000"/>
+                <a:lumOff val="40000"/>
+              </a:schemeClr>
             </a:solidFill>
             <a:miter lim="800000"/>
           </a:ln>
@@ -3494,7 +3504,7 @@
           <a:p>
             <a:fld id="{6F60A7F0-D342-4A54-9125-FF639292C250}" type="datetimeFigureOut">
               <a:rPr lang="ru-RU" smtClean="0"/>
-              <a:t>09.06.2026</a:t>
+              <a:t>10.06.2026</a:t>
             </a:fld>
             <a:endParaRPr lang="ru-RU"/>
           </a:p>
@@ -3545,7 +3555,7 @@
     </p:spTree>
     <p:extLst>
       <p:ext uri="{BB962C8B-B14F-4D97-AF65-F5344CB8AC3E}">
-        <p14:creationId xmlns:p14="http://schemas.microsoft.com/office/powerpoint/2010/main" val="2350175039"/>
+        <p14:creationId xmlns:p14="http://schemas.microsoft.com/office/powerpoint/2010/main" val="2078662963"/>
       </p:ext>
     </p:extLst>
   </p:cSld>
@@ -3702,7 +3712,7 @@
           <a:p>
             <a:fld id="{6F60A7F0-D342-4A54-9125-FF639292C250}" type="datetimeFigureOut">
               <a:rPr lang="ru-RU" smtClean="0"/>
-              <a:t>09.06.2026</a:t>
+              <a:t>10.06.2026</a:t>
             </a:fld>
             <a:endParaRPr lang="ru-RU"/>
           </a:p>
@@ -3753,7 +3763,7 @@
     </p:spTree>
     <p:extLst>
       <p:ext uri="{BB962C8B-B14F-4D97-AF65-F5344CB8AC3E}">
-        <p14:creationId xmlns:p14="http://schemas.microsoft.com/office/powerpoint/2010/main" val="3602271262"/>
+        <p14:creationId xmlns:p14="http://schemas.microsoft.com/office/powerpoint/2010/main" val="552586221"/>
       </p:ext>
     </p:extLst>
   </p:cSld>
@@ -3916,7 +3926,7 @@
           <a:p>
             <a:fld id="{6F60A7F0-D342-4A54-9125-FF639292C250}" type="datetimeFigureOut">
               <a:rPr lang="ru-RU" smtClean="0"/>
-              <a:t>09.06.2026</a:t>
+              <a:t>10.06.2026</a:t>
             </a:fld>
             <a:endParaRPr lang="ru-RU"/>
           </a:p>
@@ -3967,7 +3977,7 @@
     </p:spTree>
     <p:extLst>
       <p:ext uri="{BB962C8B-B14F-4D97-AF65-F5344CB8AC3E}">
-        <p14:creationId xmlns:p14="http://schemas.microsoft.com/office/powerpoint/2010/main" val="3021965958"/>
+        <p14:creationId xmlns:p14="http://schemas.microsoft.com/office/powerpoint/2010/main" val="1947885169"/>
       </p:ext>
     </p:extLst>
   </p:cSld>
@@ -4086,7 +4096,7 @@
           <a:p>
             <a:fld id="{6F60A7F0-D342-4A54-9125-FF639292C250}" type="datetimeFigureOut">
               <a:rPr lang="ru-RU" smtClean="0"/>
-              <a:t>09.06.2026</a:t>
+              <a:t>10.06.2026</a:t>
             </a:fld>
             <a:endParaRPr lang="ru-RU"/>
           </a:p>
@@ -4137,7 +4147,7 @@
     </p:spTree>
     <p:extLst>
       <p:ext uri="{BB962C8B-B14F-4D97-AF65-F5344CB8AC3E}">
-        <p14:creationId xmlns:p14="http://schemas.microsoft.com/office/powerpoint/2010/main" val="7188508"/>
+        <p14:creationId xmlns:p14="http://schemas.microsoft.com/office/powerpoint/2010/main" val="398790253"/>
       </p:ext>
     </p:extLst>
   </p:cSld>
@@ -4294,7 +4304,7 @@
           <a:p>
             <a:fld id="{6F60A7F0-D342-4A54-9125-FF639292C250}" type="datetimeFigureOut">
               <a:rPr lang="ru-RU" smtClean="0"/>
-              <a:t>09.06.2026</a:t>
+              <a:t>10.06.2026</a:t>
             </a:fld>
             <a:endParaRPr lang="ru-RU"/>
           </a:p>
@@ -4345,7 +4355,7 @@
     </p:spTree>
     <p:extLst>
       <p:ext uri="{BB962C8B-B14F-4D97-AF65-F5344CB8AC3E}">
-        <p14:creationId xmlns:p14="http://schemas.microsoft.com/office/powerpoint/2010/main" val="277352290"/>
+        <p14:creationId xmlns:p14="http://schemas.microsoft.com/office/powerpoint/2010/main" val="1356587249"/>
       </p:ext>
     </p:extLst>
   </p:cSld>
@@ -4574,7 +4584,7 @@
           <a:p>
             <a:fld id="{6F60A7F0-D342-4A54-9125-FF639292C250}" type="datetimeFigureOut">
               <a:rPr lang="ru-RU" smtClean="0"/>
-              <a:t>09.06.2026</a:t>
+              <a:t>10.06.2026</a:t>
             </a:fld>
             <a:endParaRPr lang="ru-RU"/>
           </a:p>
@@ -4625,7 +4635,7 @@
     </p:spTree>
     <p:extLst>
       <p:ext uri="{BB962C8B-B14F-4D97-AF65-F5344CB8AC3E}">
-        <p14:creationId xmlns:p14="http://schemas.microsoft.com/office/powerpoint/2010/main" val="4059232587"/>
+        <p14:creationId xmlns:p14="http://schemas.microsoft.com/office/powerpoint/2010/main" val="4178047589"/>
       </p:ext>
     </p:extLst>
   </p:cSld>
@@ -4844,7 +4854,7 @@
           <a:p>
             <a:fld id="{6F60A7F0-D342-4A54-9125-FF639292C250}" type="datetimeFigureOut">
               <a:rPr lang="ru-RU" smtClean="0"/>
-              <a:t>09.06.2026</a:t>
+              <a:t>10.06.2026</a:t>
             </a:fld>
             <a:endParaRPr lang="ru-RU"/>
           </a:p>
@@ -4895,7 +4905,7 @@
     </p:spTree>
     <p:extLst>
       <p:ext uri="{BB962C8B-B14F-4D97-AF65-F5344CB8AC3E}">
-        <p14:creationId xmlns:p14="http://schemas.microsoft.com/office/powerpoint/2010/main" val="2227622553"/>
+        <p14:creationId xmlns:p14="http://schemas.microsoft.com/office/powerpoint/2010/main" val="2597397800"/>
       </p:ext>
     </p:extLst>
   </p:cSld>
@@ -5259,7 +5269,7 @@
           <a:p>
             <a:fld id="{6F60A7F0-D342-4A54-9125-FF639292C250}" type="datetimeFigureOut">
               <a:rPr lang="ru-RU" smtClean="0"/>
-              <a:t>09.06.2026</a:t>
+              <a:t>10.06.2026</a:t>
             </a:fld>
             <a:endParaRPr lang="ru-RU"/>
           </a:p>
@@ -5310,7 +5320,7 @@
     </p:spTree>
     <p:extLst>
       <p:ext uri="{BB962C8B-B14F-4D97-AF65-F5344CB8AC3E}">
-        <p14:creationId xmlns:p14="http://schemas.microsoft.com/office/powerpoint/2010/main" val="4250863383"/>
+        <p14:creationId xmlns:p14="http://schemas.microsoft.com/office/powerpoint/2010/main" val="1440317985"/>
       </p:ext>
     </p:extLst>
   </p:cSld>
@@ -5407,7 +5417,7 @@
           <a:p>
             <a:fld id="{6F60A7F0-D342-4A54-9125-FF639292C250}" type="datetimeFigureOut">
               <a:rPr lang="ru-RU" smtClean="0"/>
-              <a:t>09.06.2026</a:t>
+              <a:t>10.06.2026</a:t>
             </a:fld>
             <a:endParaRPr lang="ru-RU"/>
           </a:p>
@@ -5458,7 +5468,7 @@
     </p:spTree>
     <p:extLst>
       <p:ext uri="{BB962C8B-B14F-4D97-AF65-F5344CB8AC3E}">
-        <p14:creationId xmlns:p14="http://schemas.microsoft.com/office/powerpoint/2010/main" val="495470492"/>
+        <p14:creationId xmlns:p14="http://schemas.microsoft.com/office/powerpoint/2010/main" val="3447827269"/>
       </p:ext>
     </p:extLst>
   </p:cSld>
@@ -5535,7 +5545,7 @@
           <a:p>
             <a:fld id="{6F60A7F0-D342-4A54-9125-FF639292C250}" type="datetimeFigureOut">
               <a:rPr lang="ru-RU" smtClean="0"/>
-              <a:t>09.06.2026</a:t>
+              <a:t>10.06.2026</a:t>
             </a:fld>
             <a:endParaRPr lang="ru-RU"/>
           </a:p>
@@ -5586,7 +5596,7 @@
     </p:spTree>
     <p:extLst>
       <p:ext uri="{BB962C8B-B14F-4D97-AF65-F5344CB8AC3E}">
-        <p14:creationId xmlns:p14="http://schemas.microsoft.com/office/powerpoint/2010/main" val="2583146222"/>
+        <p14:creationId xmlns:p14="http://schemas.microsoft.com/office/powerpoint/2010/main" val="860368291"/>
       </p:ext>
     </p:extLst>
   </p:cSld>
@@ -5817,7 +5827,7 @@
           <a:p>
             <a:fld id="{6F60A7F0-D342-4A54-9125-FF639292C250}" type="datetimeFigureOut">
               <a:rPr lang="ru-RU" smtClean="0"/>
-              <a:t>09.06.2026</a:t>
+              <a:t>10.06.2026</a:t>
             </a:fld>
             <a:endParaRPr lang="ru-RU"/>
           </a:p>
@@ -5868,7 +5878,7 @@
     </p:spTree>
     <p:extLst>
       <p:ext uri="{BB962C8B-B14F-4D97-AF65-F5344CB8AC3E}">
-        <p14:creationId xmlns:p14="http://schemas.microsoft.com/office/powerpoint/2010/main" val="4143552970"/>
+        <p14:creationId xmlns:p14="http://schemas.microsoft.com/office/powerpoint/2010/main" val="3042397745"/>
       </p:ext>
     </p:extLst>
   </p:cSld>
@@ -5980,7 +5990,10 @@
           <a:noFill/>
           <a:ln w="82550" cap="sq">
             <a:solidFill>
-              <a:srgbClr val="EAEAEA"/>
+              <a:schemeClr val="bg2">
+                <a:lumMod val="60000"/>
+                <a:lumOff val="40000"/>
+              </a:schemeClr>
             </a:solidFill>
             <a:miter lim="800000"/>
           </a:ln>
@@ -6129,7 +6142,7 @@
           <a:p>
             <a:fld id="{6F60A7F0-D342-4A54-9125-FF639292C250}" type="datetimeFigureOut">
               <a:rPr lang="ru-RU" smtClean="0"/>
-              <a:t>09.06.2026</a:t>
+              <a:t>10.06.2026</a:t>
             </a:fld>
             <a:endParaRPr lang="ru-RU"/>
           </a:p>
@@ -6180,7 +6193,7 @@
     </p:spTree>
     <p:extLst>
       <p:ext uri="{BB962C8B-B14F-4D97-AF65-F5344CB8AC3E}">
-        <p14:creationId xmlns:p14="http://schemas.microsoft.com/office/powerpoint/2010/main" val="1836563663"/>
+        <p14:creationId xmlns:p14="http://schemas.microsoft.com/office/powerpoint/2010/main" val="2327998360"/>
       </p:ext>
     </p:extLst>
   </p:cSld>
@@ -6197,8 +6210,8 @@
 <p:sldMaster xmlns:a="http://schemas.openxmlformats.org/drawingml/2006/main" xmlns:r="http://schemas.openxmlformats.org/officeDocument/2006/relationships" xmlns:p="http://schemas.openxmlformats.org/presentationml/2006/main">
   <p:cSld>
     <p:bg>
-      <p:bgRef idx="1002">
-        <a:schemeClr val="bg1"/>
+      <p:bgRef idx="1003">
+        <a:schemeClr val="bg2"/>
       </p:bgRef>
     </p:bg>
     <p:spTree>
@@ -6225,7 +6238,7 @@
         </p:nvPicPr>
         <p:blipFill>
           <a:blip r:embed="rId20">
-            <a:alphaModFix/>
+            <a:alphaModFix amt="70000"/>
             <a:extLst>
               <a:ext uri="{28A0092B-C50C-407E-A947-70E740481C1C}">
                 <a14:useLocalDpi xmlns:a14="http://schemas.microsoft.com/office/drawing/2010/main" val="0"/>
@@ -6239,7 +6252,7 @@
         </p:blipFill>
         <p:spPr bwMode="auto">
           <a:xfrm>
-            <a:off x="0" y="-1"/>
+            <a:off x="0" y="0"/>
             <a:ext cx="12192003" cy="6858001"/>
           </a:xfrm>
           <a:prstGeom prst="rect">
@@ -6385,7 +6398,7 @@
           <a:p>
             <a:fld id="{6F60A7F0-D342-4A54-9125-FF639292C250}" type="datetimeFigureOut">
               <a:rPr lang="ru-RU" smtClean="0"/>
-              <a:t>09.06.2026</a:t>
+              <a:t>10.06.2026</a:t>
             </a:fld>
             <a:endParaRPr lang="ru-RU"/>
           </a:p>
@@ -6468,30 +6481,30 @@
     </p:spTree>
     <p:extLst>
       <p:ext uri="{BB962C8B-B14F-4D97-AF65-F5344CB8AC3E}">
-        <p14:creationId xmlns:p14="http://schemas.microsoft.com/office/powerpoint/2010/main" val="2621511811"/>
+        <p14:creationId xmlns:p14="http://schemas.microsoft.com/office/powerpoint/2010/main" val="1933595659"/>
       </p:ext>
     </p:extLst>
   </p:cSld>
   <p:clrMap bg1="lt1" tx1="dk1" bg2="lt2" tx2="dk2" accent1="accent1" accent2="accent2" accent3="accent3" accent4="accent4" accent5="accent5" accent6="accent6" hlink="hlink" folHlink="folHlink"/>
   <p:sldLayoutIdLst>
-    <p:sldLayoutId id="2147483679" r:id="rId1"/>
-    <p:sldLayoutId id="2147483680" r:id="rId2"/>
-    <p:sldLayoutId id="2147483681" r:id="rId3"/>
-    <p:sldLayoutId id="2147483682" r:id="rId4"/>
-    <p:sldLayoutId id="2147483683" r:id="rId5"/>
-    <p:sldLayoutId id="2147483684" r:id="rId6"/>
-    <p:sldLayoutId id="2147483685" r:id="rId7"/>
-    <p:sldLayoutId id="2147483686" r:id="rId8"/>
-    <p:sldLayoutId id="2147483687" r:id="rId9"/>
-    <p:sldLayoutId id="2147483688" r:id="rId10"/>
-    <p:sldLayoutId id="2147483689" r:id="rId11"/>
-    <p:sldLayoutId id="2147483690" r:id="rId12"/>
-    <p:sldLayoutId id="2147483691" r:id="rId13"/>
-    <p:sldLayoutId id="2147483692" r:id="rId14"/>
-    <p:sldLayoutId id="2147483693" r:id="rId15"/>
-    <p:sldLayoutId id="2147483694" r:id="rId16"/>
-    <p:sldLayoutId id="2147483695" r:id="rId17"/>
-    <p:sldLayoutId id="2147483696" r:id="rId18"/>
+    <p:sldLayoutId id="2147483793" r:id="rId1"/>
+    <p:sldLayoutId id="2147483794" r:id="rId2"/>
+    <p:sldLayoutId id="2147483795" r:id="rId3"/>
+    <p:sldLayoutId id="2147483796" r:id="rId4"/>
+    <p:sldLayoutId id="2147483797" r:id="rId5"/>
+    <p:sldLayoutId id="2147483798" r:id="rId6"/>
+    <p:sldLayoutId id="2147483799" r:id="rId7"/>
+    <p:sldLayoutId id="2147483800" r:id="rId8"/>
+    <p:sldLayoutId id="2147483801" r:id="rId9"/>
+    <p:sldLayoutId id="2147483802" r:id="rId10"/>
+    <p:sldLayoutId id="2147483803" r:id="rId11"/>
+    <p:sldLayoutId id="2147483804" r:id="rId12"/>
+    <p:sldLayoutId id="2147483805" r:id="rId13"/>
+    <p:sldLayoutId id="2147483806" r:id="rId14"/>
+    <p:sldLayoutId id="2147483807" r:id="rId15"/>
+    <p:sldLayoutId id="2147483808" r:id="rId16"/>
+    <p:sldLayoutId id="2147483809" r:id="rId17"/>
+    <p:sldLayoutId id="2147483810" r:id="rId18"/>
   </p:sldLayoutIdLst>
   <p:transition>
     <p:cover/>
@@ -6846,7 +6859,7 @@
         <p:spPr>
           <a:xfrm>
             <a:off x="845128" y="346364"/>
-            <a:ext cx="10612582" cy="6151418"/>
+            <a:ext cx="10612582" cy="1235977"/>
           </a:xfrm>
           <a:prstGeom prst="rect">
             <a:avLst/>
@@ -6858,11 +6871,11 @@
         </p:spPr>
         <p:txBody>
           <a:bodyPr spcFirstLastPara="1" wrap="square" lIns="91425" tIns="45700" rIns="91425" bIns="45700" anchor="b" anchorCtr="0">
-            <a:normAutofit fontScale="90000"/>
+            <a:noAutofit/>
           </a:bodyPr>
           <a:lstStyle/>
           <a:p>
-            <a:pPr marL="0" lvl="0" indent="0" algn="l" rtl="0">
+            <a:pPr marL="0" lvl="0" indent="0" rtl="0">
               <a:spcBef>
                 <a:spcPts val="0"/>
               </a:spcBef>
@@ -6876,80 +6889,8 @@
               <a:buFont typeface="Times New Roman"/>
               <a:buNone/>
             </a:pPr>
-            <a:br>
-              <a:rPr lang="ru-RU" sz="2700" dirty="0">
-                <a:latin typeface="Times New Roman"/>
-                <a:ea typeface="Times New Roman"/>
-                <a:cs typeface="Times New Roman"/>
-                <a:sym typeface="Times New Roman"/>
-              </a:rPr>
-            </a:br>
-            <a:br>
-              <a:rPr lang="ru-RU" sz="2700" dirty="0">
-                <a:latin typeface="Times New Roman"/>
-                <a:ea typeface="Times New Roman"/>
-                <a:cs typeface="Times New Roman"/>
-                <a:sym typeface="Times New Roman"/>
-              </a:rPr>
-            </a:br>
-            <a:br>
-              <a:rPr lang="ru-RU" sz="2700" dirty="0">
-                <a:latin typeface="Times New Roman"/>
-                <a:ea typeface="Times New Roman"/>
-                <a:cs typeface="Times New Roman"/>
-                <a:sym typeface="Times New Roman"/>
-              </a:rPr>
-            </a:br>
-            <a:br>
-              <a:rPr lang="ru-RU" sz="2700" dirty="0">
-                <a:latin typeface="Times New Roman"/>
-                <a:ea typeface="Times New Roman"/>
-                <a:cs typeface="Times New Roman"/>
-                <a:sym typeface="Times New Roman"/>
-              </a:rPr>
-            </a:br>
-            <a:br>
-              <a:rPr lang="ru-RU" sz="2700" dirty="0">
-                <a:latin typeface="Times New Roman"/>
-                <a:ea typeface="Times New Roman"/>
-                <a:cs typeface="Times New Roman"/>
-                <a:sym typeface="Times New Roman"/>
-              </a:rPr>
-            </a:br>
-            <a:br>
-              <a:rPr lang="ru-RU" sz="2700" dirty="0">
-                <a:latin typeface="Times New Roman"/>
-                <a:ea typeface="Times New Roman"/>
-                <a:cs typeface="Times New Roman"/>
-                <a:sym typeface="Times New Roman"/>
-              </a:rPr>
-            </a:br>
-            <a:br>
-              <a:rPr lang="ru-RU" sz="2700" dirty="0">
-                <a:latin typeface="Times New Roman"/>
-                <a:ea typeface="Times New Roman"/>
-                <a:cs typeface="Times New Roman"/>
-                <a:sym typeface="Times New Roman"/>
-              </a:rPr>
-            </a:br>
-            <a:br>
-              <a:rPr lang="ru-RU" sz="2700" dirty="0">
-                <a:latin typeface="Times New Roman"/>
-                <a:ea typeface="Times New Roman"/>
-                <a:cs typeface="Times New Roman"/>
-                <a:sym typeface="Times New Roman"/>
-              </a:rPr>
-            </a:br>
-            <a:br>
-              <a:rPr lang="ru-RU" sz="2700" dirty="0">
-                <a:latin typeface="Times New Roman"/>
-                <a:ea typeface="Times New Roman"/>
-                <a:cs typeface="Times New Roman"/>
-                <a:sym typeface="Times New Roman"/>
-              </a:rPr>
-            </a:br>
-            <a:r>
-              <a:rPr lang="ru-RU" sz="2700" dirty="0">
+            <a:r>
+              <a:rPr lang="ru-RU" sz="1800" dirty="0">
                 <a:latin typeface="Times New Roman" panose="02020603050405020304" pitchFamily="18" charset="0"/>
                 <a:ea typeface="Times New Roman"/>
                 <a:cs typeface="Times New Roman" panose="02020603050405020304" pitchFamily="18" charset="0"/>
@@ -6965,201 +6906,101 @@
                 <a:sym typeface="Times New Roman"/>
               </a:rPr>
             </a:br>
+            <a:r>
+              <a:rPr lang="ru-RU" sz="2400" dirty="0">
+                <a:latin typeface="Times New Roman" panose="02020603050405020304" pitchFamily="18" charset="0"/>
+                <a:ea typeface="Times New Roman"/>
+                <a:cs typeface="Times New Roman" panose="02020603050405020304" pitchFamily="18" charset="0"/>
+                <a:sym typeface="Times New Roman"/>
+              </a:rPr>
+              <a:t> </a:t>
+            </a:r>
+            <a:endParaRPr dirty="0">
+              <a:latin typeface="Times New Roman" panose="02020603050405020304" pitchFamily="18" charset="0"/>
+              <a:ea typeface="Times New Roman"/>
+              <a:cs typeface="Times New Roman" panose="02020603050405020304" pitchFamily="18" charset="0"/>
+              <a:sym typeface="Times New Roman"/>
+            </a:endParaRPr>
+          </a:p>
+        </p:txBody>
+      </p:sp>
+      <p:sp>
+        <p:nvSpPr>
+          <p:cNvPr id="2" name="Прямоугольник 1"/>
+          <p:cNvSpPr/>
+          <p:nvPr/>
+        </p:nvSpPr>
+        <p:spPr>
+          <a:xfrm>
+            <a:off x="1978089" y="1582341"/>
+            <a:ext cx="9060025" cy="1354217"/>
+          </a:xfrm>
+          <a:prstGeom prst="rect">
+            <a:avLst/>
+          </a:prstGeom>
+        </p:spPr>
+        <p:txBody>
+          <a:bodyPr wrap="square">
+            <a:spAutoFit/>
+          </a:bodyPr>
+          <a:lstStyle/>
+          <a:p>
+            <a:pPr algn="ctr"/>
+            <a:r>
+              <a:rPr lang="ru-RU" sz="3200" b="1" dirty="0">
+                <a:solidFill>
+                  <a:schemeClr val="tx2">
+                    <a:lumMod val="25000"/>
+                  </a:schemeClr>
+                </a:solidFill>
+                <a:latin typeface="Times New Roman" panose="02020603050405020304" pitchFamily="18" charset="0"/>
+                <a:ea typeface="Times New Roman"/>
+                <a:cs typeface="Times New Roman" panose="02020603050405020304" pitchFamily="18" charset="0"/>
+                <a:sym typeface="Times New Roman"/>
+              </a:rPr>
+              <a:t>Тема: Разработка интернет-магазина товаров для дома</a:t>
+            </a:r>
             <a:br>
-              <a:rPr lang="ru-RU" sz="2700" dirty="0">
+              <a:rPr lang="ru-RU" dirty="0">
+                <a:solidFill>
+                  <a:schemeClr val="bg1"/>
+                </a:solidFill>
                 <a:latin typeface="Times New Roman" panose="02020603050405020304" pitchFamily="18" charset="0"/>
                 <a:ea typeface="Times New Roman"/>
                 <a:cs typeface="Times New Roman" panose="02020603050405020304" pitchFamily="18" charset="0"/>
                 <a:sym typeface="Times New Roman"/>
               </a:rPr>
             </a:br>
-            <a:r>
-              <a:rPr lang="ru-RU" sz="2700" dirty="0">
-                <a:latin typeface="Times New Roman" panose="02020603050405020304" pitchFamily="18" charset="0"/>
-                <a:ea typeface="Times New Roman"/>
-                <a:cs typeface="Times New Roman" panose="02020603050405020304" pitchFamily="18" charset="0"/>
-                <a:sym typeface="Times New Roman"/>
-              </a:rPr>
-              <a:t>Тема: Разработка интернет-магазина товаров для дома</a:t>
-            </a:r>
-            <a:br>
-              <a:rPr lang="ru-RU" sz="2700" dirty="0">
-                <a:latin typeface="Times New Roman" panose="02020603050405020304" pitchFamily="18" charset="0"/>
-                <a:ea typeface="Times New Roman"/>
-                <a:cs typeface="Times New Roman" panose="02020603050405020304" pitchFamily="18" charset="0"/>
-                <a:sym typeface="Times New Roman"/>
-              </a:rPr>
-            </a:br>
-            <a:br>
-              <a:rPr lang="ru-RU" sz="2700" dirty="0">
-                <a:latin typeface="Times New Roman" panose="02020603050405020304" pitchFamily="18" charset="0"/>
-                <a:ea typeface="Times New Roman"/>
-                <a:cs typeface="Times New Roman" panose="02020603050405020304" pitchFamily="18" charset="0"/>
-                <a:sym typeface="Times New Roman"/>
-              </a:rPr>
-            </a:br>
-            <a:r>
-              <a:rPr lang="ru-RU" sz="2700" dirty="0">
-                <a:latin typeface="Times New Roman" panose="02020603050405020304" pitchFamily="18" charset="0"/>
-                <a:ea typeface="Times New Roman"/>
-                <a:cs typeface="Times New Roman" panose="02020603050405020304" pitchFamily="18" charset="0"/>
-                <a:sym typeface="Times New Roman"/>
-              </a:rPr>
-              <a:t>Выполнил:</a:t>
-            </a:r>
-            <a:br>
-              <a:rPr lang="ru-RU" sz="2700" dirty="0">
-                <a:latin typeface="Times New Roman" panose="02020603050405020304" pitchFamily="18" charset="0"/>
-                <a:ea typeface="Times New Roman"/>
-                <a:cs typeface="Times New Roman" panose="02020603050405020304" pitchFamily="18" charset="0"/>
-                <a:sym typeface="Times New Roman"/>
-              </a:rPr>
-            </a:br>
-            <a:r>
-              <a:rPr lang="ru-RU" sz="2700" dirty="0">
-                <a:latin typeface="Times New Roman" panose="02020603050405020304" pitchFamily="18" charset="0"/>
-                <a:ea typeface="Times New Roman"/>
-                <a:cs typeface="Times New Roman" panose="02020603050405020304" pitchFamily="18" charset="0"/>
-                <a:sym typeface="Times New Roman"/>
-              </a:rPr>
-              <a:t>обучающийся группы ИСП 22-22</a:t>
-            </a:r>
-            <a:br>
-              <a:rPr lang="ru-RU" sz="2700" dirty="0">
-                <a:latin typeface="Times New Roman" panose="02020603050405020304" pitchFamily="18" charset="0"/>
-                <a:ea typeface="Times New Roman"/>
-                <a:cs typeface="Times New Roman" panose="02020603050405020304" pitchFamily="18" charset="0"/>
-                <a:sym typeface="Times New Roman"/>
-              </a:rPr>
-            </a:br>
-            <a:r>
-              <a:rPr lang="ru-RU" sz="2700" dirty="0">
-                <a:latin typeface="Times New Roman" panose="02020603050405020304" pitchFamily="18" charset="0"/>
-                <a:ea typeface="Times New Roman"/>
-                <a:cs typeface="Times New Roman" panose="02020603050405020304" pitchFamily="18" charset="0"/>
-                <a:sym typeface="Times New Roman"/>
-              </a:rPr>
-              <a:t>специальность 09.02.07</a:t>
-            </a:r>
-            <a:br>
-              <a:rPr lang="ru-RU" sz="2700" dirty="0">
-                <a:latin typeface="Times New Roman" panose="02020603050405020304" pitchFamily="18" charset="0"/>
-                <a:ea typeface="Times New Roman"/>
-                <a:cs typeface="Times New Roman" panose="02020603050405020304" pitchFamily="18" charset="0"/>
-                <a:sym typeface="Times New Roman"/>
-              </a:rPr>
-            </a:br>
-            <a:r>
-              <a:rPr lang="ru-RU" sz="2700" dirty="0">
-                <a:latin typeface="Times New Roman" panose="02020603050405020304" pitchFamily="18" charset="0"/>
-                <a:ea typeface="Times New Roman"/>
-                <a:cs typeface="Times New Roman" panose="02020603050405020304" pitchFamily="18" charset="0"/>
-                <a:sym typeface="Times New Roman"/>
-              </a:rPr>
-              <a:t>Информационные системы и    </a:t>
-            </a:r>
-            <a:br>
-              <a:rPr lang="ru-RU" sz="2700" dirty="0">
-                <a:latin typeface="Times New Roman" panose="02020603050405020304" pitchFamily="18" charset="0"/>
-                <a:ea typeface="Times New Roman"/>
-                <a:cs typeface="Times New Roman" panose="02020603050405020304" pitchFamily="18" charset="0"/>
-                <a:sym typeface="Times New Roman"/>
-              </a:rPr>
-            </a:br>
-            <a:r>
-              <a:rPr lang="ru-RU" sz="2700" dirty="0">
-                <a:latin typeface="Times New Roman" panose="02020603050405020304" pitchFamily="18" charset="0"/>
-                <a:ea typeface="Times New Roman"/>
-                <a:cs typeface="Times New Roman" panose="02020603050405020304" pitchFamily="18" charset="0"/>
-                <a:sym typeface="Times New Roman"/>
-              </a:rPr>
-              <a:t>программирования</a:t>
-            </a:r>
-            <a:br>
-              <a:rPr lang="ru-RU" sz="2700" dirty="0">
-                <a:latin typeface="Times New Roman" panose="02020603050405020304" pitchFamily="18" charset="0"/>
-                <a:ea typeface="Times New Roman"/>
-                <a:cs typeface="Times New Roman" panose="02020603050405020304" pitchFamily="18" charset="0"/>
-                <a:sym typeface="Times New Roman"/>
-              </a:rPr>
-            </a:br>
-            <a:r>
-              <a:rPr lang="ru-RU" sz="2700" dirty="0">
-                <a:latin typeface="Times New Roman" panose="02020603050405020304" pitchFamily="18" charset="0"/>
-                <a:ea typeface="Times New Roman"/>
-                <a:cs typeface="Times New Roman" panose="02020603050405020304" pitchFamily="18" charset="0"/>
-                <a:sym typeface="Times New Roman"/>
-              </a:rPr>
-              <a:t> </a:t>
-            </a:r>
-            <a:br>
-              <a:rPr lang="ru-RU" sz="2700" dirty="0">
-                <a:latin typeface="Times New Roman" panose="02020603050405020304" pitchFamily="18" charset="0"/>
-                <a:ea typeface="Times New Roman"/>
-                <a:cs typeface="Times New Roman" panose="02020603050405020304" pitchFamily="18" charset="0"/>
-                <a:sym typeface="Times New Roman"/>
-              </a:rPr>
-            </a:br>
-            <a:r>
-              <a:rPr lang="ru-RU" sz="2700" dirty="0">
-                <a:latin typeface="Times New Roman" panose="02020603050405020304" pitchFamily="18" charset="0"/>
-                <a:ea typeface="Times New Roman"/>
-                <a:cs typeface="Times New Roman" panose="02020603050405020304" pitchFamily="18" charset="0"/>
-                <a:sym typeface="Times New Roman"/>
-              </a:rPr>
-              <a:t>_________________ Хурсин М.А.</a:t>
-            </a:r>
-            <a:br>
-              <a:rPr lang="ru-RU" sz="2700" dirty="0">
-                <a:latin typeface="Times New Roman" panose="02020603050405020304" pitchFamily="18" charset="0"/>
-                <a:ea typeface="Times New Roman"/>
-                <a:cs typeface="Times New Roman" panose="02020603050405020304" pitchFamily="18" charset="0"/>
-                <a:sym typeface="Times New Roman"/>
-              </a:rPr>
-            </a:br>
-            <a:r>
-              <a:rPr lang="ru-RU" sz="2700" dirty="0">
-                <a:latin typeface="Times New Roman" panose="02020603050405020304" pitchFamily="18" charset="0"/>
-                <a:ea typeface="Times New Roman"/>
-                <a:cs typeface="Times New Roman" panose="02020603050405020304" pitchFamily="18" charset="0"/>
-                <a:sym typeface="Times New Roman"/>
-              </a:rPr>
-              <a:t> </a:t>
-            </a:r>
-            <a:br>
-              <a:rPr lang="ru-RU" sz="2700" dirty="0">
-                <a:latin typeface="Times New Roman" panose="02020603050405020304" pitchFamily="18" charset="0"/>
-                <a:ea typeface="Times New Roman"/>
-                <a:cs typeface="Times New Roman" panose="02020603050405020304" pitchFamily="18" charset="0"/>
-                <a:sym typeface="Times New Roman"/>
-              </a:rPr>
-            </a:br>
-            <a:r>
-              <a:rPr lang="ru-RU" sz="2700" dirty="0">
-                <a:latin typeface="Times New Roman" panose="02020603050405020304" pitchFamily="18" charset="0"/>
-                <a:ea typeface="Times New Roman"/>
-                <a:cs typeface="Times New Roman" panose="02020603050405020304" pitchFamily="18" charset="0"/>
-                <a:sym typeface="Times New Roman"/>
-              </a:rPr>
-              <a:t>Руководитель:</a:t>
-            </a:r>
-            <a:br>
-              <a:rPr lang="ru-RU" sz="2700" dirty="0">
-                <a:latin typeface="Times New Roman" panose="02020603050405020304" pitchFamily="18" charset="0"/>
-                <a:ea typeface="Times New Roman"/>
-                <a:cs typeface="Times New Roman" panose="02020603050405020304" pitchFamily="18" charset="0"/>
-                <a:sym typeface="Times New Roman"/>
-              </a:rPr>
-            </a:br>
-            <a:r>
-              <a:rPr lang="ru-RU" sz="2700" dirty="0">
-                <a:latin typeface="Times New Roman" panose="02020603050405020304" pitchFamily="18" charset="0"/>
-                <a:ea typeface="Times New Roman"/>
-                <a:cs typeface="Times New Roman" panose="02020603050405020304" pitchFamily="18" charset="0"/>
-                <a:sym typeface="Times New Roman"/>
-              </a:rPr>
-              <a:t>_________________ Зверев М.В.</a:t>
-            </a:r>
+            <a:endParaRPr lang="ru-RU" dirty="0">
+              <a:solidFill>
+                <a:schemeClr val="bg1"/>
+              </a:solidFill>
+            </a:endParaRPr>
+          </a:p>
+        </p:txBody>
+      </p:sp>
+      <p:sp>
+        <p:nvSpPr>
+          <p:cNvPr id="3" name="Прямоугольник 2"/>
+          <p:cNvSpPr/>
+          <p:nvPr/>
+        </p:nvSpPr>
+        <p:spPr>
+          <a:xfrm>
+            <a:off x="7884367" y="3789318"/>
+            <a:ext cx="3573343" cy="1754326"/>
+          </a:xfrm>
+          <a:prstGeom prst="rect">
+            <a:avLst/>
+          </a:prstGeom>
+        </p:spPr>
+        <p:txBody>
+          <a:bodyPr wrap="square">
+            <a:spAutoFit/>
+          </a:bodyPr>
+          <a:lstStyle/>
+          <a:p>
+            <a:pPr algn="r"/>
             <a:br>
               <a:rPr lang="ru-RU" dirty="0">
                 <a:latin typeface="Times New Roman" panose="02020603050405020304" pitchFamily="18" charset="0"/>
@@ -7169,27 +7010,228 @@
               </a:rPr>
             </a:br>
             <a:r>
-              <a:rPr lang="ru-RU" sz="2400" dirty="0">
+              <a:rPr lang="ru-RU" dirty="0">
                 <a:latin typeface="Times New Roman" panose="02020603050405020304" pitchFamily="18" charset="0"/>
                 <a:ea typeface="Times New Roman"/>
                 <a:cs typeface="Times New Roman" panose="02020603050405020304" pitchFamily="18" charset="0"/>
                 <a:sym typeface="Times New Roman"/>
               </a:rPr>
-              <a:t> </a:t>
-            </a:r>
-            <a:endParaRPr dirty="0">
-              <a:latin typeface="Times New Roman" panose="02020603050405020304" pitchFamily="18" charset="0"/>
-              <a:ea typeface="Times New Roman"/>
-              <a:cs typeface="Times New Roman" panose="02020603050405020304" pitchFamily="18" charset="0"/>
-              <a:sym typeface="Times New Roman"/>
-            </a:endParaRPr>
+              <a:t> </a:t>
+            </a:r>
+            <a:br>
+              <a:rPr lang="ru-RU" dirty="0">
+                <a:latin typeface="Times New Roman" panose="02020603050405020304" pitchFamily="18" charset="0"/>
+                <a:ea typeface="Times New Roman"/>
+                <a:cs typeface="Times New Roman" panose="02020603050405020304" pitchFamily="18" charset="0"/>
+                <a:sym typeface="Times New Roman"/>
+              </a:rPr>
+            </a:br>
+            <a:r>
+              <a:rPr lang="ru-RU" dirty="0">
+                <a:latin typeface="Times New Roman" panose="02020603050405020304" pitchFamily="18" charset="0"/>
+                <a:ea typeface="Times New Roman"/>
+                <a:cs typeface="Times New Roman" panose="02020603050405020304" pitchFamily="18" charset="0"/>
+                <a:sym typeface="Times New Roman"/>
+              </a:rPr>
+              <a:t>_________________ </a:t>
+            </a:r>
+            <a:r>
+              <a:rPr lang="ru-RU" b="1" dirty="0" err="1">
+                <a:latin typeface="Times New Roman" panose="02020603050405020304" pitchFamily="18" charset="0"/>
+                <a:ea typeface="Times New Roman"/>
+                <a:cs typeface="Times New Roman" panose="02020603050405020304" pitchFamily="18" charset="0"/>
+                <a:sym typeface="Times New Roman"/>
+              </a:rPr>
+              <a:t>Хурсин</a:t>
+            </a:r>
+            <a:r>
+              <a:rPr lang="ru-RU" b="1" dirty="0">
+                <a:latin typeface="Times New Roman" panose="02020603050405020304" pitchFamily="18" charset="0"/>
+                <a:ea typeface="Times New Roman"/>
+                <a:cs typeface="Times New Roman" panose="02020603050405020304" pitchFamily="18" charset="0"/>
+                <a:sym typeface="Times New Roman"/>
+              </a:rPr>
+              <a:t> М.А.</a:t>
+            </a:r>
+            <a:br>
+              <a:rPr lang="ru-RU" b="1" dirty="0">
+                <a:latin typeface="Times New Roman" panose="02020603050405020304" pitchFamily="18" charset="0"/>
+                <a:ea typeface="Times New Roman"/>
+                <a:cs typeface="Times New Roman" panose="02020603050405020304" pitchFamily="18" charset="0"/>
+                <a:sym typeface="Times New Roman"/>
+              </a:rPr>
+            </a:br>
+            <a:r>
+              <a:rPr lang="ru-RU" dirty="0">
+                <a:latin typeface="Times New Roman" panose="02020603050405020304" pitchFamily="18" charset="0"/>
+                <a:ea typeface="Times New Roman"/>
+                <a:cs typeface="Times New Roman" panose="02020603050405020304" pitchFamily="18" charset="0"/>
+                <a:sym typeface="Times New Roman"/>
+              </a:rPr>
+              <a:t> </a:t>
+            </a:r>
+            <a:br>
+              <a:rPr lang="ru-RU" dirty="0">
+                <a:latin typeface="Times New Roman" panose="02020603050405020304" pitchFamily="18" charset="0"/>
+                <a:ea typeface="Times New Roman"/>
+                <a:cs typeface="Times New Roman" panose="02020603050405020304" pitchFamily="18" charset="0"/>
+                <a:sym typeface="Times New Roman"/>
+              </a:rPr>
+            </a:br>
+            <a:r>
+              <a:rPr lang="ru-RU" b="1" dirty="0">
+                <a:latin typeface="Times New Roman" panose="02020603050405020304" pitchFamily="18" charset="0"/>
+                <a:ea typeface="Times New Roman"/>
+                <a:cs typeface="Times New Roman" panose="02020603050405020304" pitchFamily="18" charset="0"/>
+                <a:sym typeface="Times New Roman"/>
+              </a:rPr>
+              <a:t>Руководитель:</a:t>
+            </a:r>
+            <a:br>
+              <a:rPr lang="ru-RU" b="1" dirty="0">
+                <a:latin typeface="Times New Roman" panose="02020603050405020304" pitchFamily="18" charset="0"/>
+                <a:ea typeface="Times New Roman"/>
+                <a:cs typeface="Times New Roman" panose="02020603050405020304" pitchFamily="18" charset="0"/>
+                <a:sym typeface="Times New Roman"/>
+              </a:rPr>
+            </a:br>
+            <a:r>
+              <a:rPr lang="ru-RU" dirty="0">
+                <a:latin typeface="Times New Roman" panose="02020603050405020304" pitchFamily="18" charset="0"/>
+                <a:ea typeface="Times New Roman"/>
+                <a:cs typeface="Times New Roman" panose="02020603050405020304" pitchFamily="18" charset="0"/>
+                <a:sym typeface="Times New Roman"/>
+              </a:rPr>
+              <a:t>________________</a:t>
+            </a:r>
+            <a:r>
+              <a:rPr lang="en-US" dirty="0">
+                <a:latin typeface="Times New Roman" panose="02020603050405020304" pitchFamily="18" charset="0"/>
+                <a:ea typeface="Times New Roman"/>
+                <a:cs typeface="Times New Roman" panose="02020603050405020304" pitchFamily="18" charset="0"/>
+                <a:sym typeface="Times New Roman"/>
+              </a:rPr>
+              <a:t>__</a:t>
+            </a:r>
+            <a:r>
+              <a:rPr lang="ru-RU" b="1" dirty="0">
+                <a:latin typeface="Times New Roman" panose="02020603050405020304" pitchFamily="18" charset="0"/>
+                <a:ea typeface="Times New Roman"/>
+                <a:cs typeface="Times New Roman" panose="02020603050405020304" pitchFamily="18" charset="0"/>
+                <a:sym typeface="Times New Roman"/>
+              </a:rPr>
+              <a:t>Зверев М.В.</a:t>
+            </a:r>
+            <a:endParaRPr lang="ru-RU" b="1" dirty="0"/>
+          </a:p>
+        </p:txBody>
+      </p:sp>
+      <p:sp>
+        <p:nvSpPr>
+          <p:cNvPr id="4" name="Прямоугольник 3"/>
+          <p:cNvSpPr/>
+          <p:nvPr/>
+        </p:nvSpPr>
+        <p:spPr>
+          <a:xfrm>
+            <a:off x="7884367" y="2936558"/>
+            <a:ext cx="3869094" cy="1477328"/>
+          </a:xfrm>
+          <a:prstGeom prst="rect">
+            <a:avLst/>
+          </a:prstGeom>
+        </p:spPr>
+        <p:txBody>
+          <a:bodyPr wrap="square">
+            <a:spAutoFit/>
+          </a:bodyPr>
+          <a:lstStyle/>
+          <a:p>
+            <a:r>
+              <a:rPr lang="ru-RU" dirty="0">
+                <a:latin typeface="Times New Roman" panose="02020603050405020304" pitchFamily="18" charset="0"/>
+                <a:ea typeface="Times New Roman"/>
+                <a:cs typeface="Times New Roman" panose="02020603050405020304" pitchFamily="18" charset="0"/>
+                <a:sym typeface="Times New Roman"/>
+              </a:rPr>
+              <a:t>Выполнил:</a:t>
+            </a:r>
+            <a:br>
+              <a:rPr lang="ru-RU" dirty="0">
+                <a:latin typeface="Times New Roman" panose="02020603050405020304" pitchFamily="18" charset="0"/>
+                <a:ea typeface="Times New Roman"/>
+                <a:cs typeface="Times New Roman" panose="02020603050405020304" pitchFamily="18" charset="0"/>
+                <a:sym typeface="Times New Roman"/>
+              </a:rPr>
+            </a:br>
+            <a:r>
+              <a:rPr lang="ru-RU" dirty="0">
+                <a:latin typeface="Times New Roman" panose="02020603050405020304" pitchFamily="18" charset="0"/>
+                <a:ea typeface="Times New Roman"/>
+                <a:cs typeface="Times New Roman" panose="02020603050405020304" pitchFamily="18" charset="0"/>
+                <a:sym typeface="Times New Roman"/>
+              </a:rPr>
+              <a:t>обучающийся группы ИСП 22-22</a:t>
+            </a:r>
+            <a:br>
+              <a:rPr lang="ru-RU" dirty="0">
+                <a:latin typeface="Times New Roman" panose="02020603050405020304" pitchFamily="18" charset="0"/>
+                <a:ea typeface="Times New Roman"/>
+                <a:cs typeface="Times New Roman" panose="02020603050405020304" pitchFamily="18" charset="0"/>
+                <a:sym typeface="Times New Roman"/>
+              </a:rPr>
+            </a:br>
+            <a:r>
+              <a:rPr lang="ru-RU" dirty="0">
+                <a:latin typeface="Times New Roman" panose="02020603050405020304" pitchFamily="18" charset="0"/>
+                <a:ea typeface="Times New Roman"/>
+                <a:cs typeface="Times New Roman" panose="02020603050405020304" pitchFamily="18" charset="0"/>
+                <a:sym typeface="Times New Roman"/>
+              </a:rPr>
+              <a:t>специальность 09.02.07</a:t>
+            </a:r>
+            <a:br>
+              <a:rPr lang="ru-RU" dirty="0">
+                <a:latin typeface="Times New Roman" panose="02020603050405020304" pitchFamily="18" charset="0"/>
+                <a:ea typeface="Times New Roman"/>
+                <a:cs typeface="Times New Roman" panose="02020603050405020304" pitchFamily="18" charset="0"/>
+                <a:sym typeface="Times New Roman"/>
+              </a:rPr>
+            </a:br>
+            <a:r>
+              <a:rPr lang="ru-RU" dirty="0">
+                <a:latin typeface="Times New Roman" panose="02020603050405020304" pitchFamily="18" charset="0"/>
+                <a:ea typeface="Times New Roman"/>
+                <a:cs typeface="Times New Roman" panose="02020603050405020304" pitchFamily="18" charset="0"/>
+                <a:sym typeface="Times New Roman"/>
+              </a:rPr>
+              <a:t>Информационные системы и    </a:t>
+            </a:r>
+            <a:br>
+              <a:rPr lang="ru-RU" dirty="0">
+                <a:latin typeface="Times New Roman" panose="02020603050405020304" pitchFamily="18" charset="0"/>
+                <a:ea typeface="Times New Roman"/>
+                <a:cs typeface="Times New Roman" panose="02020603050405020304" pitchFamily="18" charset="0"/>
+                <a:sym typeface="Times New Roman"/>
+              </a:rPr>
+            </a:br>
+            <a:r>
+              <a:rPr lang="ru-RU" dirty="0">
+                <a:latin typeface="Times New Roman" panose="02020603050405020304" pitchFamily="18" charset="0"/>
+                <a:ea typeface="Times New Roman"/>
+                <a:cs typeface="Times New Roman" panose="02020603050405020304" pitchFamily="18" charset="0"/>
+                <a:sym typeface="Times New Roman"/>
+              </a:rPr>
+              <a:t>программирования</a:t>
+            </a:r>
+            <a:endParaRPr lang="ru-RU" dirty="0"/>
           </a:p>
         </p:txBody>
       </p:sp>
     </p:spTree>
     <p:extLst>
       <p:ext uri="{BB962C8B-B14F-4D97-AF65-F5344CB8AC3E}">
-        <p14:creationId xmlns:p14="http://schemas.microsoft.com/office/powerpoint/2010/main" val="742581426"/>
+        <p14:creationId xmlns:p14="http://schemas.microsoft.com/office/powerpoint/2010/main" val="1330068856"/>
       </p:ext>
     </p:extLst>
   </p:cSld>
@@ -7254,7 +7296,12 @@
           <a:p>
             <a:pPr algn="ctr" defTabSz="914400"/>
             <a:r>
-              <a:rPr lang="ru-RU" sz="4000" dirty="0">
+              <a:rPr lang="ru-RU" sz="4000" b="1" dirty="0">
+                <a:solidFill>
+                  <a:schemeClr val="tx2">
+                    <a:lumMod val="25000"/>
+                  </a:schemeClr>
+                </a:solidFill>
                 <a:latin typeface="Times New Roman" panose="02020603050405020304" pitchFamily="18" charset="0"/>
                 <a:ea typeface="Instrument Sans SemiBold" pitchFamily="34" charset="-122"/>
                 <a:cs typeface="Times New Roman" panose="02020603050405020304" pitchFamily="18" charset="0"/>
@@ -7286,14 +7333,82 @@
         </p:blipFill>
         <p:spPr>
           <a:xfrm>
-            <a:off x="573664" y="2549424"/>
-            <a:ext cx="11044673" cy="3091430"/>
+            <a:off x="1782492" y="1436088"/>
+            <a:ext cx="8627012" cy="2414721"/>
           </a:xfrm>
           <a:prstGeom prst="rect">
             <a:avLst/>
           </a:prstGeom>
         </p:spPr>
       </p:pic>
+      <p:pic>
+        <p:nvPicPr>
+          <p:cNvPr id="5" name="Рисунок 4">
+            <a:extLst>
+              <a:ext uri="{FF2B5EF4-FFF2-40B4-BE49-F238E27FC236}">
+                <a16:creationId xmlns:a16="http://schemas.microsoft.com/office/drawing/2014/main" id="{F8AFD2C4-DA97-A2FC-9BBE-33BD956E69BE}"/>
+              </a:ext>
+            </a:extLst>
+          </p:cNvPr>
+          <p:cNvPicPr>
+            <a:picLocks noChangeAspect="1"/>
+          </p:cNvPicPr>
+          <p:nvPr/>
+        </p:nvPicPr>
+        <p:blipFill>
+          <a:blip r:embed="rId3"/>
+          <a:stretch>
+            <a:fillRect/>
+          </a:stretch>
+        </p:blipFill>
+        <p:spPr>
+          <a:xfrm>
+            <a:off x="1782492" y="4616350"/>
+            <a:ext cx="8627012" cy="1742332"/>
+          </a:xfrm>
+          <a:prstGeom prst="rect">
+            <a:avLst/>
+          </a:prstGeom>
+        </p:spPr>
+      </p:pic>
+      <p:sp>
+        <p:nvSpPr>
+          <p:cNvPr id="3" name="Прямоугольник 2"/>
+          <p:cNvSpPr/>
+          <p:nvPr/>
+        </p:nvSpPr>
+        <p:spPr>
+          <a:xfrm>
+            <a:off x="3689554" y="3850809"/>
+            <a:ext cx="4532972" cy="707886"/>
+          </a:xfrm>
+          <a:prstGeom prst="rect">
+            <a:avLst/>
+          </a:prstGeom>
+        </p:spPr>
+        <p:txBody>
+          <a:bodyPr wrap="none">
+            <a:spAutoFit/>
+          </a:bodyPr>
+          <a:lstStyle/>
+          <a:p>
+            <a:pPr lvl="0" algn="ctr" defTabSz="914400"/>
+            <a:r>
+              <a:rPr lang="ru-RU" sz="4000" b="1" dirty="0">
+                <a:solidFill>
+                  <a:schemeClr val="tx2">
+                    <a:lumMod val="25000"/>
+                  </a:schemeClr>
+                </a:solidFill>
+                <a:latin typeface="Times New Roman" panose="02020603050405020304" pitchFamily="18" charset="0"/>
+                <a:ea typeface="Instrument Sans SemiBold" pitchFamily="34" charset="-122"/>
+                <a:cs typeface="Times New Roman" panose="02020603050405020304" pitchFamily="18" charset="0"/>
+              </a:rPr>
+              <a:t>Интерфейс — вход</a:t>
+            </a:r>
+          </a:p>
+        </p:txBody>
+      </p:sp>
     </p:spTree>
     <p:extLst>
       <p:ext uri="{BB962C8B-B14F-4D97-AF65-F5344CB8AC3E}">
@@ -7318,114 +7433,6 @@
         <p:cNvPr id="1" name="">
           <a:extLst>
             <a:ext uri="{FF2B5EF4-FFF2-40B4-BE49-F238E27FC236}">
-              <a16:creationId xmlns:a16="http://schemas.microsoft.com/office/drawing/2014/main" id="{80FD1D67-FAC9-44E6-CED4-E2A1AF4D47FB}"/>
-            </a:ext>
-          </a:extLst>
-        </p:cNvPr>
-        <p:cNvGrpSpPr/>
-        <p:nvPr/>
-      </p:nvGrpSpPr>
-      <p:grpSpPr>
-        <a:xfrm>
-          <a:off x="0" y="0"/>
-          <a:ext cx="0" cy="0"/>
-          <a:chOff x="0" y="0"/>
-          <a:chExt cx="0" cy="0"/>
-        </a:xfrm>
-      </p:grpSpPr>
-      <p:sp>
-        <p:nvSpPr>
-          <p:cNvPr id="8" name="Text 0">
-            <a:extLst>
-              <a:ext uri="{FF2B5EF4-FFF2-40B4-BE49-F238E27FC236}">
-                <a16:creationId xmlns:a16="http://schemas.microsoft.com/office/drawing/2014/main" id="{79702A0F-33E8-CD7A-DD7C-4CED6EBCD0BB}"/>
-              </a:ext>
-            </a:extLst>
-          </p:cNvPr>
-          <p:cNvSpPr/>
-          <p:nvPr/>
-        </p:nvSpPr>
-        <p:spPr>
-          <a:xfrm>
-            <a:off x="1420989" y="720000"/>
-            <a:ext cx="9350022" cy="650484"/>
-          </a:xfrm>
-          <a:prstGeom prst="rect">
-            <a:avLst/>
-          </a:prstGeom>
-          <a:noFill/>
-          <a:ln/>
-        </p:spPr>
-        <p:txBody>
-          <a:bodyPr wrap="none" lIns="0" tIns="0" rIns="0" bIns="0" rtlCol="0" anchor="t"/>
-          <a:lstStyle/>
-          <a:p>
-            <a:pPr algn="ctr" defTabSz="914400"/>
-            <a:r>
-              <a:rPr lang="ru-RU" sz="4000" dirty="0">
-                <a:latin typeface="Times New Roman" panose="02020603050405020304" pitchFamily="18" charset="0"/>
-                <a:ea typeface="Instrument Sans SemiBold" pitchFamily="34" charset="-122"/>
-                <a:cs typeface="Times New Roman" panose="02020603050405020304" pitchFamily="18" charset="0"/>
-              </a:rPr>
-              <a:t>Интерфейс — вход</a:t>
-            </a:r>
-          </a:p>
-        </p:txBody>
-      </p:sp>
-      <p:pic>
-        <p:nvPicPr>
-          <p:cNvPr id="3" name="Рисунок 2">
-            <a:extLst>
-              <a:ext uri="{FF2B5EF4-FFF2-40B4-BE49-F238E27FC236}">
-                <a16:creationId xmlns:a16="http://schemas.microsoft.com/office/drawing/2014/main" id="{F8AFD2C4-DA97-A2FC-9BBE-33BD956E69BE}"/>
-              </a:ext>
-            </a:extLst>
-          </p:cNvPr>
-          <p:cNvPicPr>
-            <a:picLocks noChangeAspect="1"/>
-          </p:cNvPicPr>
-          <p:nvPr/>
-        </p:nvPicPr>
-        <p:blipFill>
-          <a:blip r:embed="rId2"/>
-          <a:stretch>
-            <a:fillRect/>
-          </a:stretch>
-        </p:blipFill>
-        <p:spPr>
-          <a:xfrm>
-            <a:off x="606648" y="2828734"/>
-            <a:ext cx="10978705" cy="2217285"/>
-          </a:xfrm>
-          <a:prstGeom prst="rect">
-            <a:avLst/>
-          </a:prstGeom>
-        </p:spPr>
-      </p:pic>
-    </p:spTree>
-    <p:extLst>
-      <p:ext uri="{BB962C8B-B14F-4D97-AF65-F5344CB8AC3E}">
-        <p14:creationId xmlns:p14="http://schemas.microsoft.com/office/powerpoint/2010/main" val="1776709639"/>
-      </p:ext>
-    </p:extLst>
-  </p:cSld>
-  <p:clrMapOvr>
-    <a:masterClrMapping/>
-  </p:clrMapOvr>
-  <p:transition>
-    <p:cover/>
-  </p:transition>
-</p:sld>
-</file>
-
-<file path=ppt/slides/slide12.xml><?xml version="1.0" encoding="utf-8"?>
-<p:sld xmlns:a="http://schemas.openxmlformats.org/drawingml/2006/main" xmlns:r="http://schemas.openxmlformats.org/officeDocument/2006/relationships" xmlns:p="http://schemas.openxmlformats.org/presentationml/2006/main">
-  <p:cSld>
-    <p:spTree>
-      <p:nvGrpSpPr>
-        <p:cNvPr id="1" name="">
-          <a:extLst>
-            <a:ext uri="{FF2B5EF4-FFF2-40B4-BE49-F238E27FC236}">
               <a16:creationId xmlns:a16="http://schemas.microsoft.com/office/drawing/2014/main" id="{07E624F6-3E5E-1959-EDA8-BD2FFB6A19EE}"/>
             </a:ext>
           </a:extLst>
@@ -7470,7 +7477,12 @@
           <a:p>
             <a:pPr algn="ctr" defTabSz="914400"/>
             <a:r>
-              <a:rPr lang="ru-RU" sz="4000" dirty="0">
+              <a:rPr lang="ru-RU" sz="4000" b="1" dirty="0">
+                <a:solidFill>
+                  <a:schemeClr val="tx2">
+                    <a:lumMod val="25000"/>
+                  </a:schemeClr>
+                </a:solidFill>
                 <a:latin typeface="Times New Roman" panose="02020603050405020304" pitchFamily="18" charset="0"/>
                 <a:ea typeface="Instrument Sans SemiBold" pitchFamily="34" charset="-122"/>
                 <a:cs typeface="Times New Roman" panose="02020603050405020304" pitchFamily="18" charset="0"/>
@@ -7502,8 +7514,8 @@
         </p:blipFill>
         <p:spPr>
           <a:xfrm>
-            <a:off x="672822" y="2262900"/>
-            <a:ext cx="10846357" cy="3200565"/>
+            <a:off x="1092454" y="1656410"/>
+            <a:ext cx="10007092" cy="2952913"/>
           </a:xfrm>
           <a:prstGeom prst="rect">
             <a:avLst/>
@@ -7526,7 +7538,7 @@
 </p:sld>
 </file>
 
-<file path=ppt/slides/slide13.xml><?xml version="1.0" encoding="utf-8"?>
+<file path=ppt/slides/slide12.xml><?xml version="1.0" encoding="utf-8"?>
 <p:sld xmlns:a="http://schemas.openxmlformats.org/drawingml/2006/main" xmlns:r="http://schemas.openxmlformats.org/officeDocument/2006/relationships" xmlns:p="http://schemas.openxmlformats.org/presentationml/2006/main">
   <p:cSld>
     <p:spTree>
@@ -7578,7 +7590,12 @@
           <a:p>
             <a:pPr algn="ctr" defTabSz="914400"/>
             <a:r>
-              <a:rPr lang="ru-RU" sz="4000" dirty="0">
+              <a:rPr lang="ru-RU" sz="4000" b="1" dirty="0">
+                <a:solidFill>
+                  <a:schemeClr val="tx2">
+                    <a:lumMod val="25000"/>
+                  </a:schemeClr>
+                </a:solidFill>
                 <a:latin typeface="Times New Roman" panose="02020603050405020304" pitchFamily="18" charset="0"/>
                 <a:ea typeface="Instrument Sans SemiBold" pitchFamily="34" charset="-122"/>
                 <a:cs typeface="Times New Roman" panose="02020603050405020304" pitchFamily="18" charset="0"/>
@@ -7617,8 +7634,8 @@
         </p:blipFill>
         <p:spPr bwMode="auto">
           <a:xfrm>
-            <a:off x="3061145" y="1763684"/>
-            <a:ext cx="6069711" cy="4655236"/>
+            <a:off x="3200696" y="1547587"/>
+            <a:ext cx="5790607" cy="4441174"/>
           </a:xfrm>
           <a:prstGeom prst="rect">
             <a:avLst/>
@@ -7651,7 +7668,7 @@
 </p:sld>
 </file>
 
-<file path=ppt/slides/slide14.xml><?xml version="1.0" encoding="utf-8"?>
+<file path=ppt/slides/slide13.xml><?xml version="1.0" encoding="utf-8"?>
 <p:sld xmlns:a="http://schemas.openxmlformats.org/drawingml/2006/main" xmlns:r="http://schemas.openxmlformats.org/officeDocument/2006/relationships" xmlns:p="http://schemas.openxmlformats.org/presentationml/2006/main">
   <p:cSld>
     <p:spTree>
@@ -7703,7 +7720,12 @@
           <a:p>
             <a:pPr algn="ctr" defTabSz="914400"/>
             <a:r>
-              <a:rPr lang="ru-RU" sz="4000" dirty="0">
+              <a:rPr lang="ru-RU" sz="4000" b="1" dirty="0">
+                <a:solidFill>
+                  <a:schemeClr val="tx2">
+                    <a:lumMod val="25000"/>
+                  </a:schemeClr>
+                </a:solidFill>
                 <a:latin typeface="Times New Roman" panose="02020603050405020304" pitchFamily="18" charset="0"/>
                 <a:ea typeface="Instrument Sans SemiBold" pitchFamily="34" charset="-122"/>
                 <a:cs typeface="Times New Roman" panose="02020603050405020304" pitchFamily="18" charset="0"/>
@@ -7735,7 +7757,7 @@
         </p:blipFill>
         <p:spPr>
           <a:xfrm>
-            <a:off x="4063813" y="2171431"/>
+            <a:off x="4063812" y="1583042"/>
             <a:ext cx="4064375" cy="3966569"/>
           </a:xfrm>
           <a:prstGeom prst="rect">
@@ -7759,7 +7781,7 @@
 </p:sld>
 </file>
 
-<file path=ppt/slides/slide15.xml><?xml version="1.0" encoding="utf-8"?>
+<file path=ppt/slides/slide14.xml><?xml version="1.0" encoding="utf-8"?>
 <p:sld xmlns:a="http://schemas.openxmlformats.org/drawingml/2006/main" xmlns:r="http://schemas.openxmlformats.org/officeDocument/2006/relationships" xmlns:p="http://schemas.openxmlformats.org/presentationml/2006/main">
   <p:cSld>
     <p:spTree>
@@ -7811,30 +7833,24 @@
           <a:p>
             <a:pPr algn="ctr"/>
             <a:r>
-              <a:rPr lang="en-US" sz="4000" dirty="0" err="1">
+              <a:rPr lang="en-US" sz="4000" b="1" dirty="0">
+                <a:solidFill>
+                  <a:schemeClr val="tx2">
+                    <a:lumMod val="25000"/>
+                  </a:schemeClr>
+                </a:solidFill>
                 <a:latin typeface="Times New Roman" panose="02020603050405020304" pitchFamily="18" charset="0"/>
                 <a:ea typeface="Instrument Sans SemiBold" pitchFamily="34" charset="-122"/>
                 <a:cs typeface="Times New Roman" panose="02020603050405020304" pitchFamily="18" charset="0"/>
               </a:rPr>
-              <a:t>Преимущества</a:t>
-            </a:r>
-            <a:r>
-              <a:rPr lang="en-US" sz="4000" dirty="0">
-                <a:latin typeface="Times New Roman" panose="02020603050405020304" pitchFamily="18" charset="0"/>
-                <a:ea typeface="Instrument Sans SemiBold" pitchFamily="34" charset="-122"/>
-                <a:cs typeface="Times New Roman" panose="02020603050405020304" pitchFamily="18" charset="0"/>
-              </a:rPr>
-              <a:t> </a:t>
-            </a:r>
-            <a:r>
-              <a:rPr lang="en-US" sz="4000" dirty="0" err="1">
-                <a:latin typeface="Times New Roman" panose="02020603050405020304" pitchFamily="18" charset="0"/>
-                <a:ea typeface="Instrument Sans SemiBold" pitchFamily="34" charset="-122"/>
-                <a:cs typeface="Times New Roman" panose="02020603050405020304" pitchFamily="18" charset="0"/>
-              </a:rPr>
-              <a:t>системы</a:t>
-            </a:r>
-            <a:endParaRPr lang="en-US" sz="4000" dirty="0">
+              <a:t>Преимущества системы</a:t>
+            </a:r>
+            <a:endParaRPr lang="en-US" sz="4000" b="1" dirty="0">
+              <a:solidFill>
+                <a:schemeClr val="tx2">
+                  <a:lumMod val="25000"/>
+                </a:schemeClr>
+              </a:solidFill>
               <a:latin typeface="Times New Roman" panose="02020603050405020304" pitchFamily="18" charset="0"/>
               <a:cs typeface="Times New Roman" panose="02020603050405020304" pitchFamily="18" charset="0"/>
             </a:endParaRPr>
@@ -7856,7 +7872,7 @@
         <p:spPr>
           <a:xfrm>
             <a:off x="914400" y="2164006"/>
-            <a:ext cx="10628671" cy="2529988"/>
+            <a:ext cx="10628671" cy="2585323"/>
           </a:xfrm>
           <a:prstGeom prst="rect">
             <a:avLst/>
@@ -7875,7 +7891,12 @@
               </a:lnSpc>
             </a:pPr>
             <a:r>
-              <a:rPr lang="ru-RU" sz="2800" dirty="0">
+              <a:rPr lang="ru-RU" sz="2800" b="1" dirty="0">
+                <a:solidFill>
+                  <a:schemeClr val="tx2">
+                    <a:lumMod val="50000"/>
+                  </a:schemeClr>
+                </a:solidFill>
                 <a:latin typeface="Times New Roman" panose="02020603050405020304" pitchFamily="18" charset="0"/>
                 <a:cs typeface="Times New Roman" panose="02020603050405020304" pitchFamily="18" charset="0"/>
               </a:rPr>
@@ -7983,7 +8004,7 @@
                 <a:latin typeface="Times New Roman" panose="02020603050405020304" pitchFamily="18" charset="0"/>
                 <a:cs typeface="Times New Roman" panose="02020603050405020304" pitchFamily="18" charset="0"/>
               </a:rPr>
-              <a:t>;</a:t>
+              <a:t>.</a:t>
             </a:r>
             <a:endParaRPr lang="ru-RU" sz="2000" dirty="0">
               <a:latin typeface="Times New Roman" panose="02020603050405020304" pitchFamily="18" charset="0"/>
@@ -8008,7 +8029,7 @@
 </p:sld>
 </file>
 
-<file path=ppt/slides/slide16.xml><?xml version="1.0" encoding="utf-8"?>
+<file path=ppt/slides/slide15.xml><?xml version="1.0" encoding="utf-8"?>
 <p:sld xmlns:a="http://schemas.openxmlformats.org/drawingml/2006/main" xmlns:r="http://schemas.openxmlformats.org/officeDocument/2006/relationships" xmlns:p="http://schemas.openxmlformats.org/presentationml/2006/main">
   <p:cSld>
     <p:spTree>
@@ -8060,14 +8081,24 @@
           <a:p>
             <a:pPr algn="ctr"/>
             <a:r>
-              <a:rPr lang="ru-RU" sz="4000" dirty="0">
+              <a:rPr lang="ru-RU" sz="4000" b="1" dirty="0">
+                <a:solidFill>
+                  <a:schemeClr val="tx2">
+                    <a:lumMod val="25000"/>
+                  </a:schemeClr>
+                </a:solidFill>
                 <a:latin typeface="Times New Roman" panose="02020603050405020304" pitchFamily="18" charset="0"/>
                 <a:ea typeface="Instrument Sans SemiBold" pitchFamily="34" charset="-122"/>
                 <a:cs typeface="Times New Roman" panose="02020603050405020304" pitchFamily="18" charset="0"/>
               </a:rPr>
-              <a:t>Заключение и дальнейшее развитие</a:t>
-            </a:r>
-            <a:endParaRPr lang="en-US" sz="4000" dirty="0">
+              <a:t>Вывод</a:t>
+            </a:r>
+            <a:endParaRPr lang="en-US" sz="4000" b="1" dirty="0">
+              <a:solidFill>
+                <a:schemeClr val="tx2">
+                  <a:lumMod val="25000"/>
+                </a:schemeClr>
+              </a:solidFill>
               <a:latin typeface="Times New Roman" panose="02020603050405020304" pitchFamily="18" charset="0"/>
               <a:cs typeface="Times New Roman" panose="02020603050405020304" pitchFamily="18" charset="0"/>
             </a:endParaRPr>
@@ -8088,8 +8119,8 @@
         </p:nvSpPr>
         <p:spPr>
           <a:xfrm>
-            <a:off x="914400" y="2164006"/>
-            <a:ext cx="10628671" cy="1883657"/>
+            <a:off x="781664" y="1510863"/>
+            <a:ext cx="10628671" cy="2400657"/>
           </a:xfrm>
           <a:prstGeom prst="rect">
             <a:avLst/>
@@ -8112,7 +8143,21 @@
                 <a:latin typeface="Times New Roman" panose="02020603050405020304" pitchFamily="18" charset="0"/>
                 <a:cs typeface="Times New Roman" panose="02020603050405020304" pitchFamily="18" charset="0"/>
               </a:rPr>
-              <a:t>Проект демонстрирует практическое применение современных подходов к разработке программного обеспечения. В частности, акцент сделан на такие важные аспекты, как модульность системы — разделение функциональности на независимые и легко управляемые компоненты, что способствует удобству поддержки и расширения.</a:t>
+              <a:t>Проект демонстрирует практическое применение современных подходов к разработке программного обеспечения. В частности, акцент сделан на такие важные аспекты, как модульность системы — разделение функциональности на независимые и легко управляемые компоненты, что способствует удобству поддержки и расширения. </a:t>
+            </a:r>
+          </a:p>
+          <a:p>
+            <a:pPr algn="just">
+              <a:lnSpc>
+                <a:spcPct val="150000"/>
+              </a:lnSpc>
+            </a:pPr>
+            <a:r>
+              <a:rPr lang="ru-RU" sz="2000" dirty="0">
+                <a:latin typeface="Times New Roman" panose="02020603050405020304" pitchFamily="18" charset="0"/>
+                <a:cs typeface="Times New Roman" panose="02020603050405020304" pitchFamily="18" charset="0"/>
+              </a:rPr>
+              <a:t>Поставленная цель была достигнута.</a:t>
             </a:r>
           </a:p>
         </p:txBody>
@@ -8121,94 +8166,6 @@
     <p:extLst>
       <p:ext uri="{BB962C8B-B14F-4D97-AF65-F5344CB8AC3E}">
         <p14:creationId xmlns:p14="http://schemas.microsoft.com/office/powerpoint/2010/main" val="3326510965"/>
-      </p:ext>
-    </p:extLst>
-  </p:cSld>
-  <p:clrMapOvr>
-    <a:masterClrMapping/>
-  </p:clrMapOvr>
-  <p:transition>
-    <p:cover/>
-  </p:transition>
-</p:sld>
-</file>
-
-<file path=ppt/slides/slide17.xml><?xml version="1.0" encoding="utf-8"?>
-<p:sld xmlns:a="http://schemas.openxmlformats.org/drawingml/2006/main" xmlns:r="http://schemas.openxmlformats.org/officeDocument/2006/relationships" xmlns:p="http://schemas.openxmlformats.org/presentationml/2006/main">
-  <p:cSld>
-    <p:spTree>
-      <p:nvGrpSpPr>
-        <p:cNvPr id="1" name="">
-          <a:extLst>
-            <a:ext uri="{FF2B5EF4-FFF2-40B4-BE49-F238E27FC236}">
-              <a16:creationId xmlns:a16="http://schemas.microsoft.com/office/drawing/2014/main" id="{1EFBEDB9-5483-40B5-CC0A-CEBE72ADA1E3}"/>
-            </a:ext>
-          </a:extLst>
-        </p:cNvPr>
-        <p:cNvGrpSpPr/>
-        <p:nvPr/>
-      </p:nvGrpSpPr>
-      <p:grpSpPr>
-        <a:xfrm>
-          <a:off x="0" y="0"/>
-          <a:ext cx="0" cy="0"/>
-          <a:chOff x="0" y="0"/>
-          <a:chExt cx="0" cy="0"/>
-        </a:xfrm>
-      </p:grpSpPr>
-      <p:sp>
-        <p:nvSpPr>
-          <p:cNvPr id="9" name="Text 2">
-            <a:extLst>
-              <a:ext uri="{FF2B5EF4-FFF2-40B4-BE49-F238E27FC236}">
-                <a16:creationId xmlns:a16="http://schemas.microsoft.com/office/drawing/2014/main" id="{7811D076-FB21-3BE6-D670-F12832203D7A}"/>
-              </a:ext>
-            </a:extLst>
-          </p:cNvPr>
-          <p:cNvSpPr/>
-          <p:nvPr/>
-        </p:nvSpPr>
-        <p:spPr>
-          <a:xfrm>
-            <a:off x="489247" y="2928045"/>
-            <a:ext cx="11213507" cy="1001911"/>
-          </a:xfrm>
-          <a:prstGeom prst="rect">
-            <a:avLst/>
-          </a:prstGeom>
-          <a:noFill/>
-          <a:ln/>
-        </p:spPr>
-        <p:txBody>
-          <a:bodyPr wrap="square" lIns="0" tIns="0" rIns="0" bIns="0" rtlCol="0" anchor="t">
-            <a:noAutofit/>
-          </a:bodyPr>
-          <a:lstStyle/>
-          <a:p>
-            <a:pPr algn="ctr" defTabSz="914400">
-              <a:lnSpc>
-                <a:spcPct val="121000"/>
-              </a:lnSpc>
-            </a:pPr>
-            <a:r>
-              <a:rPr lang="ru-RU" sz="5400" dirty="0">
-                <a:latin typeface="Times New Roman" panose="02020603050405020304" pitchFamily="18" charset="0"/>
-                <a:ea typeface="Instrument Sans Medium" pitchFamily="34" charset="-122"/>
-                <a:cs typeface="Times New Roman" panose="02020603050405020304" pitchFamily="18" charset="0"/>
-              </a:rPr>
-              <a:t>СПАСИБО ЗА ВНИМАНИЕ!</a:t>
-            </a:r>
-            <a:endParaRPr lang="en-US" sz="5400" dirty="0">
-              <a:latin typeface="Times New Roman" panose="02020603050405020304" pitchFamily="18" charset="0"/>
-              <a:cs typeface="Times New Roman" panose="02020603050405020304" pitchFamily="18" charset="0"/>
-            </a:endParaRPr>
-          </a:p>
-        </p:txBody>
-      </p:sp>
-    </p:spTree>
-    <p:extLst>
-      <p:ext uri="{BB962C8B-B14F-4D97-AF65-F5344CB8AC3E}">
-        <p14:creationId xmlns:p14="http://schemas.microsoft.com/office/powerpoint/2010/main" val="4002061040"/>
       </p:ext>
     </p:extLst>
   </p:cSld>
@@ -8271,7 +8228,12 @@
               </a:lnSpc>
             </a:pPr>
             <a:r>
-              <a:rPr lang="ru-RU" sz="4000" dirty="0">
+              <a:rPr lang="ru-RU" sz="4000" b="1" dirty="0">
+                <a:solidFill>
+                  <a:schemeClr val="tx2">
+                    <a:lumMod val="25000"/>
+                  </a:schemeClr>
+                </a:solidFill>
                 <a:latin typeface="Times New Roman" panose="02020603050405020304" pitchFamily="18" charset="0"/>
                 <a:ea typeface="Instrument Sans SemiBold" pitchFamily="34" charset="-122"/>
                 <a:cs typeface="Times New Roman" panose="02020603050405020304" pitchFamily="18" charset="0"/>
@@ -8279,14 +8241,24 @@
               <a:t>Цель</a:t>
             </a:r>
             <a:r>
-              <a:rPr lang="en-US" sz="4000" dirty="0">
+              <a:rPr lang="en-US" sz="4000" b="1" dirty="0">
+                <a:solidFill>
+                  <a:schemeClr val="tx2">
+                    <a:lumMod val="25000"/>
+                  </a:schemeClr>
+                </a:solidFill>
                 <a:latin typeface="Times New Roman" panose="02020603050405020304" pitchFamily="18" charset="0"/>
                 <a:ea typeface="Instrument Sans SemiBold" pitchFamily="34" charset="-122"/>
                 <a:cs typeface="Times New Roman" panose="02020603050405020304" pitchFamily="18" charset="0"/>
               </a:rPr>
               <a:t> и актуальность</a:t>
             </a:r>
-            <a:endParaRPr lang="en-US" sz="4000" dirty="0">
+            <a:endParaRPr lang="en-US" sz="4000" b="1" dirty="0">
+              <a:solidFill>
+                <a:schemeClr val="tx2">
+                  <a:lumMod val="25000"/>
+                </a:schemeClr>
+              </a:solidFill>
               <a:latin typeface="Times New Roman" panose="02020603050405020304" pitchFamily="18" charset="0"/>
               <a:cs typeface="Times New Roman" panose="02020603050405020304" pitchFamily="18" charset="0"/>
             </a:endParaRPr>
@@ -8346,14 +8318,24 @@
                 </a:lnSpc>
               </a:pPr>
               <a:r>
-                <a:rPr lang="en-US" sz="2800" dirty="0">
+                <a:rPr lang="en-US" sz="2800" b="1" dirty="0">
+                  <a:solidFill>
+                    <a:schemeClr val="tx2">
+                      <a:lumMod val="50000"/>
+                    </a:schemeClr>
+                  </a:solidFill>
                   <a:latin typeface="Times New Roman" panose="02020603050405020304" pitchFamily="18" charset="0"/>
                   <a:ea typeface="Instrument Sans SemiBold" pitchFamily="34" charset="-122"/>
                   <a:cs typeface="Times New Roman" panose="02020603050405020304" pitchFamily="18" charset="0"/>
                 </a:rPr>
                 <a:t>Цель проекта</a:t>
               </a:r>
-              <a:endParaRPr lang="en-US" sz="2800" dirty="0">
+              <a:endParaRPr lang="en-US" sz="2800" b="1" dirty="0">
+                <a:solidFill>
+                  <a:schemeClr val="tx2">
+                    <a:lumMod val="50000"/>
+                  </a:schemeClr>
+                </a:solidFill>
                 <a:latin typeface="Times New Roman" panose="02020603050405020304" pitchFamily="18" charset="0"/>
                 <a:cs typeface="Times New Roman" panose="02020603050405020304" pitchFamily="18" charset="0"/>
               </a:endParaRPr>
@@ -8463,14 +8445,24 @@
                 </a:lnSpc>
               </a:pPr>
               <a:r>
-                <a:rPr lang="en-US" sz="2800" dirty="0">
+                <a:rPr lang="en-US" sz="2800" b="1" dirty="0">
+                  <a:solidFill>
+                    <a:schemeClr val="tx2">
+                      <a:lumMod val="50000"/>
+                    </a:schemeClr>
+                  </a:solidFill>
                   <a:latin typeface="Times New Roman" panose="02020603050405020304" pitchFamily="18" charset="0"/>
                   <a:ea typeface="Instrument Sans SemiBold" pitchFamily="34" charset="-122"/>
                   <a:cs typeface="Times New Roman" panose="02020603050405020304" pitchFamily="18" charset="0"/>
                 </a:rPr>
                 <a:t>Актуальность</a:t>
               </a:r>
-              <a:endParaRPr lang="en-US" sz="2800" dirty="0">
+              <a:endParaRPr lang="en-US" sz="2800" b="1" dirty="0">
+                <a:solidFill>
+                  <a:schemeClr val="tx2">
+                    <a:lumMod val="50000"/>
+                  </a:schemeClr>
+                </a:solidFill>
                 <a:latin typeface="Times New Roman" panose="02020603050405020304" pitchFamily="18" charset="0"/>
                 <a:cs typeface="Times New Roman" panose="02020603050405020304" pitchFamily="18" charset="0"/>
               </a:endParaRPr>
@@ -8595,14 +8587,24 @@
               </a:lnSpc>
             </a:pPr>
             <a:r>
-              <a:rPr lang="ru-RU" sz="4000" dirty="0">
+              <a:rPr lang="ru-RU" sz="4000" b="1" dirty="0">
+                <a:solidFill>
+                  <a:schemeClr val="tx2">
+                    <a:lumMod val="25000"/>
+                  </a:schemeClr>
+                </a:solidFill>
                 <a:latin typeface="Times New Roman" panose="02020603050405020304" pitchFamily="18" charset="0"/>
                 <a:ea typeface="Instrument Sans SemiBold" pitchFamily="34" charset="-122"/>
                 <a:cs typeface="Times New Roman" panose="02020603050405020304" pitchFamily="18" charset="0"/>
               </a:rPr>
               <a:t>Выбор технологий</a:t>
             </a:r>
-            <a:endParaRPr lang="en-US" sz="4000" dirty="0">
+            <a:endParaRPr lang="en-US" sz="4000" b="1" dirty="0">
+              <a:solidFill>
+                <a:schemeClr val="tx2">
+                  <a:lumMod val="25000"/>
+                </a:schemeClr>
+              </a:solidFill>
               <a:latin typeface="Times New Roman" panose="02020603050405020304" pitchFamily="18" charset="0"/>
               <a:cs typeface="Times New Roman" panose="02020603050405020304" pitchFamily="18" charset="0"/>
             </a:endParaRPr>
@@ -8623,8 +8625,8 @@
         </p:nvGrpSpPr>
         <p:grpSpPr>
           <a:xfrm>
-            <a:off x="1080000" y="2160000"/>
-            <a:ext cx="4560692" cy="1086734"/>
+            <a:off x="1420989" y="1773554"/>
+            <a:ext cx="3165428" cy="1086734"/>
             <a:chOff x="908994" y="1800000"/>
             <a:chExt cx="4115290" cy="1204376"/>
           </a:xfrm>
@@ -8662,7 +8664,12 @@
                 </a:lnSpc>
               </a:pPr>
               <a:r>
-                <a:rPr lang="ru-RU" sz="2800" dirty="0">
+                <a:rPr lang="ru-RU" sz="2800" b="1" dirty="0">
+                  <a:solidFill>
+                    <a:schemeClr val="tx2">
+                      <a:lumMod val="50000"/>
+                    </a:schemeClr>
+                  </a:solidFill>
                   <a:latin typeface="Times New Roman" panose="02020603050405020304" pitchFamily="18" charset="0"/>
                   <a:ea typeface="Instrument Sans SemiBold" pitchFamily="34" charset="-122"/>
                   <a:cs typeface="Times New Roman" panose="02020603050405020304" pitchFamily="18" charset="0"/>
@@ -8677,6 +8684,11 @@
                 </a:lnSpc>
               </a:pPr>
               <a:endParaRPr lang="en-US" sz="2800" dirty="0">
+                <a:solidFill>
+                  <a:schemeClr val="tx2">
+                    <a:lumMod val="50000"/>
+                  </a:schemeClr>
+                </a:solidFill>
                 <a:latin typeface="Times New Roman" panose="02020603050405020304" pitchFamily="18" charset="0"/>
                 <a:cs typeface="Times New Roman" panose="02020603050405020304" pitchFamily="18" charset="0"/>
               </a:endParaRPr>
@@ -8719,6 +8731,11 @@
               </a:pPr>
               <a:r>
                 <a:rPr lang="en-US" sz="2000" dirty="0">
+                  <a:solidFill>
+                    <a:schemeClr val="tx2">
+                      <a:lumMod val="50000"/>
+                    </a:schemeClr>
+                  </a:solidFill>
                   <a:latin typeface="Times New Roman" panose="02020603050405020304" pitchFamily="18" charset="0"/>
                   <a:ea typeface="Instrument Sans Medium" pitchFamily="34" charset="-122"/>
                   <a:cs typeface="Times New Roman" panose="02020603050405020304" pitchFamily="18" charset="0"/>
@@ -8733,6 +8750,11 @@
                 </a:lnSpc>
               </a:pPr>
               <a:endParaRPr lang="en-US" sz="2000" dirty="0">
+                <a:solidFill>
+                  <a:schemeClr val="tx2">
+                    <a:lumMod val="50000"/>
+                  </a:schemeClr>
+                </a:solidFill>
                 <a:latin typeface="Times New Roman" panose="02020603050405020304" pitchFamily="18" charset="0"/>
                 <a:cs typeface="Times New Roman" panose="02020603050405020304" pitchFamily="18" charset="0"/>
               </a:endParaRPr>
@@ -8754,7 +8776,7 @@
         </p:nvGrpSpPr>
         <p:grpSpPr>
           <a:xfrm>
-            <a:off x="6480000" y="2160000"/>
+            <a:off x="6358702" y="1738016"/>
             <a:ext cx="4560693" cy="1086734"/>
             <a:chOff x="6655721" y="1800000"/>
             <a:chExt cx="4115290" cy="1214788"/>
@@ -8793,14 +8815,24 @@
                 </a:lnSpc>
               </a:pPr>
               <a:r>
-                <a:rPr lang="ru-RU" sz="2800" dirty="0">
+                <a:rPr lang="ru-RU" sz="2800" b="1" dirty="0">
+                  <a:solidFill>
+                    <a:schemeClr val="tx2">
+                      <a:lumMod val="50000"/>
+                    </a:schemeClr>
+                  </a:solidFill>
                   <a:latin typeface="Times New Roman" panose="02020603050405020304" pitchFamily="18" charset="0"/>
                   <a:ea typeface="Instrument Sans SemiBold" pitchFamily="34" charset="-122"/>
                   <a:cs typeface="Times New Roman" panose="02020603050405020304" pitchFamily="18" charset="0"/>
                 </a:rPr>
                 <a:t>Бэкенд</a:t>
               </a:r>
-              <a:endParaRPr lang="en-US" sz="2800" dirty="0">
+              <a:endParaRPr lang="en-US" sz="2800" b="1" dirty="0">
+                <a:solidFill>
+                  <a:schemeClr val="tx2">
+                    <a:lumMod val="50000"/>
+                  </a:schemeClr>
+                </a:solidFill>
                 <a:latin typeface="Times New Roman" panose="02020603050405020304" pitchFamily="18" charset="0"/>
                 <a:cs typeface="Times New Roman" panose="02020603050405020304" pitchFamily="18" charset="0"/>
               </a:endParaRPr>
@@ -8844,12 +8876,22 @@
               </a:pPr>
               <a:r>
                 <a:rPr lang="en-US" sz="2000" dirty="0">
+                  <a:solidFill>
+                    <a:schemeClr val="tx2">
+                      <a:lumMod val="50000"/>
+                    </a:schemeClr>
+                  </a:solidFill>
                   <a:latin typeface="Times New Roman" panose="02020603050405020304" pitchFamily="18" charset="0"/>
                   <a:cs typeface="Times New Roman" panose="02020603050405020304" pitchFamily="18" charset="0"/>
                 </a:rPr>
                 <a:t>PHP</a:t>
               </a:r>
               <a:endParaRPr lang="ru-RU" sz="2000" dirty="0">
+                <a:solidFill>
+                  <a:schemeClr val="tx2">
+                    <a:lumMod val="50000"/>
+                  </a:schemeClr>
+                </a:solidFill>
                 <a:latin typeface="Times New Roman" panose="02020603050405020304" pitchFamily="18" charset="0"/>
                 <a:cs typeface="Times New Roman" panose="02020603050405020304" pitchFamily="18" charset="0"/>
               </a:endParaRPr>
@@ -8871,7 +8913,7 @@
         </p:nvGrpSpPr>
         <p:grpSpPr>
           <a:xfrm>
-            <a:off x="1080000" y="4320000"/>
+            <a:off x="1420989" y="2927062"/>
             <a:ext cx="4560693" cy="913768"/>
             <a:chOff x="6655721" y="1800000"/>
             <a:chExt cx="4115290" cy="1214788"/>
@@ -8910,14 +8952,14 @@
                 </a:lnSpc>
               </a:pPr>
               <a:r>
-                <a:rPr lang="ru-RU" sz="2800" dirty="0">
+                <a:rPr lang="ru-RU" sz="2800" b="1" dirty="0">
                   <a:latin typeface="Times New Roman" panose="02020603050405020304" pitchFamily="18" charset="0"/>
                   <a:ea typeface="Instrument Sans SemiBold" pitchFamily="34" charset="-122"/>
                   <a:cs typeface="Times New Roman" panose="02020603050405020304" pitchFamily="18" charset="0"/>
                 </a:rPr>
                 <a:t>База данных</a:t>
               </a:r>
-              <a:endParaRPr lang="en-US" sz="2800" dirty="0">
+              <a:endParaRPr lang="en-US" sz="2800" b="1" dirty="0">
                 <a:latin typeface="Times New Roman" panose="02020603050405020304" pitchFamily="18" charset="0"/>
                 <a:cs typeface="Times New Roman" panose="02020603050405020304" pitchFamily="18" charset="0"/>
               </a:endParaRPr>
@@ -8988,7 +9030,7 @@
         </p:nvGrpSpPr>
         <p:grpSpPr>
           <a:xfrm>
-            <a:off x="6480000" y="4320000"/>
+            <a:off x="6358702" y="2949516"/>
             <a:ext cx="4560693" cy="913768"/>
             <a:chOff x="6655721" y="1800000"/>
             <a:chExt cx="4115290" cy="1214788"/>
@@ -9027,14 +9069,14 @@
                 </a:lnSpc>
               </a:pPr>
               <a:r>
-                <a:rPr lang="ru-RU" sz="2800" dirty="0">
+                <a:rPr lang="ru-RU" sz="2800" b="1" dirty="0">
                   <a:latin typeface="Times New Roman" panose="02020603050405020304" pitchFamily="18" charset="0"/>
                   <a:ea typeface="Instrument Sans SemiBold" pitchFamily="34" charset="-122"/>
                   <a:cs typeface="Times New Roman" panose="02020603050405020304" pitchFamily="18" charset="0"/>
                 </a:rPr>
                 <a:t>Инструменты</a:t>
               </a:r>
-              <a:endParaRPr lang="en-US" sz="2800" dirty="0">
+              <a:endParaRPr lang="en-US" sz="2800" b="1" dirty="0">
                 <a:latin typeface="Times New Roman" panose="02020603050405020304" pitchFamily="18" charset="0"/>
                 <a:cs typeface="Times New Roman" panose="02020603050405020304" pitchFamily="18" charset="0"/>
               </a:endParaRPr>
@@ -9163,7 +9205,12 @@
               </a:lnSpc>
             </a:pPr>
             <a:r>
-              <a:rPr lang="ru-RU" sz="4000" dirty="0">
+              <a:rPr lang="ru-RU" sz="4000" b="1" dirty="0">
+                <a:solidFill>
+                  <a:schemeClr val="tx2">
+                    <a:lumMod val="25000"/>
+                  </a:schemeClr>
+                </a:solidFill>
                 <a:latin typeface="Times New Roman" panose="02020603050405020304" pitchFamily="18" charset="0"/>
                 <a:ea typeface="Instrument Sans SemiBold" pitchFamily="34" charset="-122"/>
                 <a:cs typeface="Times New Roman" panose="02020603050405020304" pitchFamily="18" charset="0"/>
@@ -9187,8 +9234,8 @@
         </p:nvSpPr>
         <p:spPr>
           <a:xfrm>
-            <a:off x="914400" y="2164006"/>
-            <a:ext cx="10628671" cy="2529988"/>
+            <a:off x="1014929" y="1370484"/>
+            <a:ext cx="10628671" cy="2585323"/>
           </a:xfrm>
           <a:prstGeom prst="rect">
             <a:avLst/>
@@ -9207,7 +9254,12 @@
               </a:lnSpc>
             </a:pPr>
             <a:r>
-              <a:rPr lang="ru-RU" sz="2800" dirty="0">
+              <a:rPr lang="ru-RU" sz="2800" b="1" dirty="0">
+                <a:solidFill>
+                  <a:schemeClr val="tx2">
+                    <a:lumMod val="50000"/>
+                  </a:schemeClr>
+                </a:solidFill>
                 <a:latin typeface="Times New Roman" panose="02020603050405020304" pitchFamily="18" charset="0"/>
                 <a:cs typeface="Times New Roman" panose="02020603050405020304" pitchFamily="18" charset="0"/>
               </a:rPr>
@@ -9420,7 +9472,12 @@
               </a:lnSpc>
             </a:pPr>
             <a:r>
-              <a:rPr lang="ru-RU" sz="4000" dirty="0">
+              <a:rPr lang="ru-RU" sz="4000" b="1" dirty="0">
+                <a:solidFill>
+                  <a:schemeClr val="tx2">
+                    <a:lumMod val="25000"/>
+                  </a:schemeClr>
+                </a:solidFill>
                 <a:latin typeface="Times New Roman" panose="02020603050405020304" pitchFamily="18" charset="0"/>
                 <a:ea typeface="Instrument Sans SemiBold" pitchFamily="34" charset="-122"/>
                 <a:cs typeface="Times New Roman" panose="02020603050405020304" pitchFamily="18" charset="0"/>
@@ -9444,8 +9501,8 @@
         </p:nvSpPr>
         <p:spPr>
           <a:xfrm>
-            <a:off x="914400" y="2164006"/>
-            <a:ext cx="10628671" cy="2991653"/>
+            <a:off x="951722" y="1445549"/>
+            <a:ext cx="10628671" cy="3046988"/>
           </a:xfrm>
           <a:prstGeom prst="rect">
             <a:avLst/>
@@ -9464,11 +9521,28 @@
               </a:lnSpc>
             </a:pPr>
             <a:r>
-              <a:rPr lang="ru-RU" sz="2800" dirty="0">
+              <a:rPr lang="ru-RU" sz="2800" b="1" dirty="0">
+                <a:solidFill>
+                  <a:schemeClr val="tx2">
+                    <a:lumMod val="50000"/>
+                  </a:schemeClr>
+                </a:solidFill>
                 <a:latin typeface="Times New Roman" panose="02020603050405020304" pitchFamily="18" charset="0"/>
                 <a:cs typeface="Times New Roman" panose="02020603050405020304" pitchFamily="18" charset="0"/>
               </a:rPr>
-              <a:t>Клиентские требования:</a:t>
+              <a:t>Клиентские требования</a:t>
+            </a:r>
+            <a:r>
+              <a:rPr lang="ru-RU" sz="2800" dirty="0">
+                <a:solidFill>
+                  <a:schemeClr val="tx2">
+                    <a:lumMod val="50000"/>
+                  </a:schemeClr>
+                </a:solidFill>
+                <a:latin typeface="Times New Roman" panose="02020603050405020304" pitchFamily="18" charset="0"/>
+                <a:cs typeface="Times New Roman" panose="02020603050405020304" pitchFamily="18" charset="0"/>
+              </a:rPr>
+              <a:t>:</a:t>
             </a:r>
           </a:p>
           <a:p>
@@ -9676,7 +9750,12 @@
           <a:p>
             <a:pPr algn="ctr" defTabSz="914400"/>
             <a:r>
-              <a:rPr lang="ru-RU" sz="4000" dirty="0">
+              <a:rPr lang="ru-RU" sz="4000" b="1" dirty="0">
+                <a:solidFill>
+                  <a:schemeClr val="tx2">
+                    <a:lumMod val="25000"/>
+                  </a:schemeClr>
+                </a:solidFill>
                 <a:latin typeface="Times New Roman" panose="02020603050405020304" pitchFamily="18" charset="0"/>
                 <a:ea typeface="Instrument Sans SemiBold" pitchFamily="34" charset="-122"/>
                 <a:cs typeface="Times New Roman" panose="02020603050405020304" pitchFamily="18" charset="0"/>
@@ -9700,8 +9779,8 @@
         </p:nvSpPr>
         <p:spPr>
           <a:xfrm>
-            <a:off x="914400" y="2164006"/>
-            <a:ext cx="10628671" cy="2529988"/>
+            <a:off x="1017036" y="1501533"/>
+            <a:ext cx="10628671" cy="2585323"/>
           </a:xfrm>
           <a:prstGeom prst="rect">
             <a:avLst/>
@@ -9720,7 +9799,12 @@
               </a:lnSpc>
             </a:pPr>
             <a:r>
-              <a:rPr lang="ru-RU" sz="2800" dirty="0">
+              <a:rPr lang="ru-RU" sz="2800" b="1" dirty="0">
+                <a:solidFill>
+                  <a:schemeClr val="tx2">
+                    <a:lumMod val="10000"/>
+                  </a:schemeClr>
+                </a:solidFill>
                 <a:latin typeface="Times New Roman" panose="02020603050405020304" pitchFamily="18" charset="0"/>
                 <a:cs typeface="Times New Roman" panose="02020603050405020304" pitchFamily="18" charset="0"/>
               </a:rPr>
@@ -9908,7 +9992,12 @@
           <a:p>
             <a:pPr algn="ctr" defTabSz="914400"/>
             <a:r>
-              <a:rPr lang="ru-RU" sz="4000" dirty="0">
+              <a:rPr lang="ru-RU" sz="4000" b="1" dirty="0">
+                <a:solidFill>
+                  <a:schemeClr val="tx2">
+                    <a:lumMod val="25000"/>
+                  </a:schemeClr>
+                </a:solidFill>
                 <a:latin typeface="Times New Roman" panose="02020603050405020304" pitchFamily="18" charset="0"/>
                 <a:ea typeface="Instrument Sans SemiBold" pitchFamily="34" charset="-122"/>
                 <a:cs typeface="Times New Roman" panose="02020603050405020304" pitchFamily="18" charset="0"/>
@@ -9940,7 +10029,7 @@
         </p:blipFill>
         <p:spPr>
           <a:xfrm>
-            <a:off x="1599890" y="1878209"/>
+            <a:off x="1599889" y="1504984"/>
             <a:ext cx="8992221" cy="4604887"/>
           </a:xfrm>
           <a:prstGeom prst="rect">
@@ -10016,7 +10105,12 @@
           <a:p>
             <a:pPr algn="ctr" defTabSz="914400"/>
             <a:r>
-              <a:rPr lang="ru-RU" sz="4000" dirty="0">
+              <a:rPr lang="ru-RU" sz="4000" b="1" dirty="0">
+                <a:solidFill>
+                  <a:schemeClr val="tx2">
+                    <a:lumMod val="25000"/>
+                  </a:schemeClr>
+                </a:solidFill>
                 <a:latin typeface="Times New Roman" panose="02020603050405020304" pitchFamily="18" charset="0"/>
                 <a:ea typeface="Instrument Sans SemiBold" pitchFamily="34" charset="-122"/>
                 <a:cs typeface="Times New Roman" panose="02020603050405020304" pitchFamily="18" charset="0"/>
@@ -10048,7 +10142,7 @@
         </p:blipFill>
         <p:spPr>
           <a:xfrm>
-            <a:off x="1420989" y="2552800"/>
+            <a:off x="1420989" y="2058278"/>
             <a:ext cx="9350022" cy="2666800"/>
           </a:xfrm>
           <a:prstGeom prst="rect">
@@ -10124,7 +10218,12 @@
           <a:p>
             <a:pPr algn="ctr" defTabSz="914400"/>
             <a:r>
-              <a:rPr lang="ru-RU" sz="4000" dirty="0">
+              <a:rPr lang="ru-RU" sz="4000" b="1" dirty="0">
+                <a:solidFill>
+                  <a:schemeClr val="tx2">
+                    <a:lumMod val="25000"/>
+                  </a:schemeClr>
+                </a:solidFill>
                 <a:latin typeface="Times New Roman" panose="02020603050405020304" pitchFamily="18" charset="0"/>
                 <a:ea typeface="Instrument Sans SemiBold" pitchFamily="34" charset="-122"/>
                 <a:cs typeface="Times New Roman" panose="02020603050405020304" pitchFamily="18" charset="0"/>
@@ -10156,7 +10255,7 @@
         </p:blipFill>
         <p:spPr>
           <a:xfrm>
-            <a:off x="2550722" y="1752441"/>
+            <a:off x="2550722" y="1565829"/>
             <a:ext cx="7090556" cy="4826877"/>
           </a:xfrm>
           <a:prstGeom prst="rect">
@@ -10191,34 +10290,34 @@
         <a:sysClr val="window" lastClr="FFFFFF"/>
       </a:lt1>
       <a:dk2>
-        <a:srgbClr val="355071"/>
+        <a:srgbClr val="1C647B"/>
       </a:dk2>
       <a:lt2>
-        <a:srgbClr val="AABED7"/>
+        <a:srgbClr val="98B7D3"/>
       </a:lt2>
       <a:accent1>
-        <a:srgbClr val="2FA3EE"/>
+        <a:srgbClr val="274FA4"/>
       </a:accent1>
       <a:accent2>
-        <a:srgbClr val="4BCAAD"/>
+        <a:srgbClr val="48A8D0"/>
       </a:accent2>
       <a:accent3>
-        <a:srgbClr val="86C157"/>
+        <a:srgbClr val="53B18F"/>
       </a:accent3>
       <a:accent4>
-        <a:srgbClr val="D99C3F"/>
+        <a:srgbClr val="D78D38"/>
       </a:accent4>
       <a:accent5>
-        <a:srgbClr val="CE6633"/>
+        <a:srgbClr val="BA3F51"/>
       </a:accent5>
       <a:accent6>
-        <a:srgbClr val="A35DD1"/>
+        <a:srgbClr val="AE52D9"/>
       </a:accent6>
       <a:hlink>
-        <a:srgbClr val="56BCFE"/>
+        <a:srgbClr val="2AA2DA"/>
       </a:hlink>
       <a:folHlink>
-        <a:srgbClr val="97C5E3"/>
+        <a:srgbClr val="76A3B8"/>
       </a:folHlink>
     </a:clrScheme>
     <a:fontScheme name="Капля">
@@ -10416,16 +10515,16 @@
               <a:schemeClr val="phClr">
                 <a:tint val="84000"/>
                 <a:shade val="100000"/>
-                <a:hueMod val="130000"/>
-                <a:satMod val="150000"/>
-                <a:lumMod val="112000"/>
+                <a:hueMod val="92000"/>
+                <a:satMod val="180000"/>
+                <a:lumMod val="114000"/>
               </a:schemeClr>
             </a:gs>
             <a:gs pos="100000">
               <a:schemeClr val="phClr">
                 <a:shade val="92000"/>
-                <a:satMod val="140000"/>
-                <a:lumMod val="110000"/>
+                <a:satMod val="170000"/>
+                <a:lumMod val="96000"/>
               </a:schemeClr>
             </a:gs>
           </a:gsLst>
@@ -10438,7 +10537,7 @@
   <a:extraClrSchemeLst/>
   <a:extLst>
     <a:ext uri="{05A4C25C-085E-4340-85A3-A5531E510DB2}">
-      <thm15:themeFamily xmlns:thm15="http://schemas.microsoft.com/office/thememl/2012/main" name="Droplet" id="{8984A317-299A-4E50-B45D-BFC9EDE2337A}" vid="{A633B6A3-9E7F-4C10-9C98-2517A3134361}"/>
+      <thm15:themeFamily xmlns:thm15="http://schemas.microsoft.com/office/thememl/2012/main" name="Droplet" id="{8984A317-299A-4E50-B45D-BFC9EDE2337A}" vid="{DEB094D4-7FD8-4F86-93D5-B0F1341EF586}"/>
     </a:ext>
   </a:extLst>
 </a:theme>

--- a/Презентация.pptx
+++ b/Презентация.pptx
@@ -200,7 +200,7 @@
           <a:p>
             <a:fld id="{1859C5D3-A778-46E5-A401-4CF372F13560}" type="datetimeFigureOut">
               <a:rPr lang="ru-RU" smtClean="0"/>
-              <a:t>11.06.2026</a:t>
+              <a:t>19.06.2026</a:t>
             </a:fld>
             <a:endParaRPr lang="ru-RU"/>
           </a:p>
@@ -868,7 +868,7 @@
           <a:p>
             <a:fld id="{6F60A7F0-D342-4A54-9125-FF639292C250}" type="datetimeFigureOut">
               <a:rPr lang="ru-RU" smtClean="0"/>
-              <a:t>11.06.2026</a:t>
+              <a:t>19.06.2026</a:t>
             </a:fld>
             <a:endParaRPr lang="ru-RU"/>
           </a:p>
@@ -1069,7 +1069,7 @@
           <a:p>
             <a:fld id="{6F60A7F0-D342-4A54-9125-FF639292C250}" type="datetimeFigureOut">
               <a:rPr lang="ru-RU" smtClean="0"/>
-              <a:t>11.06.2026</a:t>
+              <a:t>19.06.2026</a:t>
             </a:fld>
             <a:endParaRPr lang="ru-RU"/>
           </a:p>
@@ -1277,7 +1277,7 @@
           <a:p>
             <a:fld id="{6F60A7F0-D342-4A54-9125-FF639292C250}" type="datetimeFigureOut">
               <a:rPr lang="ru-RU" smtClean="0"/>
-              <a:t>11.06.2026</a:t>
+              <a:t>19.06.2026</a:t>
             </a:fld>
             <a:endParaRPr lang="ru-RU"/>
           </a:p>
@@ -1464,7 +1464,7 @@
           <a:p>
             <a:fld id="{6F60A7F0-D342-4A54-9125-FF639292C250}" type="datetimeFigureOut">
               <a:rPr lang="ru-RU" smtClean="0"/>
-              <a:t>11.06.2026</a:t>
+              <a:t>19.06.2026</a:t>
             </a:fld>
             <a:endParaRPr lang="ru-RU"/>
           </a:p>
@@ -1650,7 +1650,7 @@
           <a:p>
             <a:fld id="{6F60A7F0-D342-4A54-9125-FF639292C250}" type="datetimeFigureOut">
               <a:rPr lang="ru-RU" smtClean="0"/>
-              <a:t>11.06.2026</a:t>
+              <a:t>19.06.2026</a:t>
             </a:fld>
             <a:endParaRPr lang="ru-RU"/>
           </a:p>
@@ -1925,7 +1925,7 @@
           <a:p>
             <a:fld id="{6F60A7F0-D342-4A54-9125-FF639292C250}" type="datetimeFigureOut">
               <a:rPr lang="ru-RU" smtClean="0"/>
-              <a:t>11.06.2026</a:t>
+              <a:t>19.06.2026</a:t>
             </a:fld>
             <a:endParaRPr lang="ru-RU"/>
           </a:p>
@@ -2193,7 +2193,7 @@
           <a:p>
             <a:fld id="{6F60A7F0-D342-4A54-9125-FF639292C250}" type="datetimeFigureOut">
               <a:rPr lang="ru-RU" smtClean="0"/>
-              <a:t>11.06.2026</a:t>
+              <a:t>19.06.2026</a:t>
             </a:fld>
             <a:endParaRPr lang="ru-RU"/>
           </a:p>
@@ -2605,7 +2605,7 @@
           <a:p>
             <a:fld id="{6F60A7F0-D342-4A54-9125-FF639292C250}" type="datetimeFigureOut">
               <a:rPr lang="ru-RU" smtClean="0"/>
-              <a:t>11.06.2026</a:t>
+              <a:t>19.06.2026</a:t>
             </a:fld>
             <a:endParaRPr lang="ru-RU"/>
           </a:p>
@@ -2746,7 +2746,7 @@
           <a:p>
             <a:fld id="{6F60A7F0-D342-4A54-9125-FF639292C250}" type="datetimeFigureOut">
               <a:rPr lang="ru-RU" smtClean="0"/>
-              <a:t>11.06.2026</a:t>
+              <a:t>19.06.2026</a:t>
             </a:fld>
             <a:endParaRPr lang="ru-RU"/>
           </a:p>
@@ -2862,7 +2862,7 @@
           <a:p>
             <a:fld id="{6F60A7F0-D342-4A54-9125-FF639292C250}" type="datetimeFigureOut">
               <a:rPr lang="ru-RU" smtClean="0"/>
-              <a:t>11.06.2026</a:t>
+              <a:t>19.06.2026</a:t>
             </a:fld>
             <a:endParaRPr lang="ru-RU"/>
           </a:p>
@@ -3176,7 +3176,7 @@
           <a:p>
             <a:fld id="{6F60A7F0-D342-4A54-9125-FF639292C250}" type="datetimeFigureOut">
               <a:rPr lang="ru-RU" smtClean="0"/>
-              <a:t>11.06.2026</a:t>
+              <a:t>19.06.2026</a:t>
             </a:fld>
             <a:endParaRPr lang="ru-RU"/>
           </a:p>
@@ -3464,7 +3464,7 @@
           <a:p>
             <a:fld id="{6F60A7F0-D342-4A54-9125-FF639292C250}" type="datetimeFigureOut">
               <a:rPr lang="ru-RU" smtClean="0"/>
-              <a:t>11.06.2026</a:t>
+              <a:t>19.06.2026</a:t>
             </a:fld>
             <a:endParaRPr lang="ru-RU"/>
           </a:p>
@@ -3708,7 +3708,7 @@
           <a:p>
             <a:fld id="{6F60A7F0-D342-4A54-9125-FF639292C250}" type="datetimeFigureOut">
               <a:rPr lang="ru-RU" smtClean="0"/>
-              <a:t>11.06.2026</a:t>
+              <a:t>19.06.2026</a:t>
             </a:fld>
             <a:endParaRPr lang="ru-RU"/>
           </a:p>
